--- a/汇报/2026-09-20_深度引导的视频虚化/深度引导的视频虚化_技术路线_0920.pptx
+++ b/汇报/2026-09-20_深度引导的视频虚化/深度引导的视频虚化_技术路线_0920.pptx
@@ -5,7 +5,7 @@
     <p:sldMasterId id="2147483648" r:id="rId1"/>
   </p:sldMasterIdLst>
   <p:notesMasterIdLst>
-    <p:notesMasterId r:id="rId12"/>
+    <p:notesMasterId r:id="rId13"/>
   </p:notesMasterIdLst>
   <p:sldIdLst>
     <p:sldId id="256" r:id="rId2"/>
@@ -18,6 +18,7 @@
     <p:sldId id="263" r:id="rId9"/>
     <p:sldId id="264" r:id="rId10"/>
     <p:sldId id="265" r:id="rId11"/>
+    <p:sldId id="266" r:id="rId12"/>
   </p:sldIdLst>
   <p:sldSz cx="12192000" cy="6858000"/>
   <p:notesSz cx="6858000" cy="9144000"/>
@@ -432,19 +433,278 @@
           <a:p>
             <a:r>
               <a:rPr lang="zh-CN" altLang="en-US"/>
-              <a:t>内容依据：</a:t>
+              <a:t>来源：</a:t>
             </a:r>
             <a:r>
               <a:rPr lang="en-US" altLang="zh-CN"/>
-              <a:t>OPPO_</a:t>
+              <a:t>01_</a:t>
             </a:r>
             <a:r>
               <a:rPr lang="zh-CN" altLang="en-US"/>
-              <a:t>技术路线梳理</a:t>
+              <a:t>文献中的五篇论文与阅读记录。</a:t>
             </a:r>
             <a:r>
               <a:rPr lang="en-US" altLang="zh-CN"/>
-              <a:t>.txt</a:t>
+              <a:t>Any-to-Bokeh</a:t>
+            </a:r>
+            <a:r>
+              <a:rPr lang="zh-CN" altLang="en-US"/>
+              <a:t>第</a:t>
+            </a:r>
+            <a:r>
+              <a:rPr lang="en-US" altLang="zh-CN"/>
+              <a:t>5</a:t>
+            </a:r>
+            <a:r>
+              <a:rPr lang="zh-CN" altLang="en-US"/>
+              <a:t>页；</a:t>
+            </a:r>
+            <a:r>
+              <a:rPr lang="en-US" altLang="zh-CN"/>
+              <a:t>MagicBokeh</a:t>
+            </a:r>
+            <a:r>
+              <a:rPr lang="zh-CN" altLang="en-US"/>
+              <a:t>第</a:t>
+            </a:r>
+            <a:r>
+              <a:rPr lang="en-US" altLang="zh-CN"/>
+              <a:t>4–5</a:t>
+            </a:r>
+            <a:r>
+              <a:rPr lang="zh-CN" altLang="en-US"/>
+              <a:t>页；</a:t>
+            </a:r>
+            <a:r>
+              <a:rPr lang="en-US" altLang="zh-CN"/>
+              <a:t>BokehCrafter</a:t>
+            </a:r>
+            <a:r>
+              <a:rPr lang="zh-CN" altLang="en-US"/>
+              <a:t>第</a:t>
+            </a:r>
+            <a:r>
+              <a:rPr lang="en-US" altLang="zh-CN"/>
+              <a:t>5–6</a:t>
+            </a:r>
+            <a:r>
+              <a:rPr lang="zh-CN" altLang="en-US"/>
+              <a:t>页；</a:t>
+            </a:r>
+            <a:r>
+              <a:rPr lang="en-US" altLang="zh-CN"/>
+              <a:t>BokehFlow</a:t>
+            </a:r>
+            <a:r>
+              <a:rPr lang="zh-CN" altLang="en-US"/>
+              <a:t>第</a:t>
+            </a:r>
+            <a:r>
+              <a:rPr lang="en-US" altLang="zh-CN"/>
+              <a:t>4</a:t>
+            </a:r>
+            <a:r>
+              <a:rPr lang="zh-CN" altLang="en-US"/>
+              <a:t>、</a:t>
+            </a:r>
+            <a:r>
+              <a:rPr lang="en-US" altLang="zh-CN"/>
+              <a:t>6–7</a:t>
+            </a:r>
+            <a:r>
+              <a:rPr lang="zh-CN" altLang="en-US"/>
+              <a:t>页；</a:t>
+            </a:r>
+            <a:r>
+              <a:rPr lang="en-US" altLang="zh-CN"/>
+              <a:t>Bokeh Diffusion</a:t>
+            </a:r>
+            <a:r>
+              <a:rPr lang="zh-CN" altLang="en-US"/>
+              <a:t>第</a:t>
+            </a:r>
+            <a:r>
+              <a:rPr lang="en-US" altLang="zh-CN"/>
+              <a:t>1–2</a:t>
+            </a:r>
+            <a:r>
+              <a:rPr lang="zh-CN" altLang="en-US"/>
+              <a:t>页。设计建议结合当前项目提出。</a:t>
+            </a:r>
+            <a:endParaRPr/>
+          </a:p>
+        </p:txBody>
+      </p:sp>
+      <p:sp>
+        <p:nvSpPr>
+          <p:cNvPr id="4" name="Slide Number Placeholder 3"/>
+          <p:cNvSpPr>
+            <a:spLocks noGrp="1"/>
+          </p:cNvSpPr>
+          <p:nvPr>
+            <p:ph type="sldNum" idx="5"/>
+          </p:nvPr>
+        </p:nvSpPr>
+        <p:spPr/>
+        <p:txBody>
+          <a:bodyPr/>
+          <a:lstStyle/>
+          <a:p>
+            <a:endParaRPr/>
+          </a:p>
+        </p:txBody>
+      </p:sp>
+    </p:spTree>
+  </p:cSld>
+  <p:clrMapOvr>
+    <a:masterClrMapping/>
+  </p:clrMapOvr>
+</p:notes>
+</file>
+
+<file path=ppt/notesSlides/notesSlide11.xml><?xml version="1.0" encoding="utf-8"?>
+<p:notes xmlns:a="http://schemas.openxmlformats.org/drawingml/2006/main" xmlns:r="http://schemas.openxmlformats.org/officeDocument/2006/relationships" xmlns:p="http://schemas.openxmlformats.org/presentationml/2006/main">
+  <p:cSld>
+    <p:spTree>
+      <p:nvGrpSpPr>
+        <p:cNvPr id="1" name=""/>
+        <p:cNvGrpSpPr/>
+        <p:nvPr/>
+      </p:nvGrpSpPr>
+      <p:grpSpPr>
+        <a:xfrm>
+          <a:off x="0" y="0"/>
+          <a:ext cx="0" cy="0"/>
+          <a:chOff x="0" y="0"/>
+          <a:chExt cx="0" cy="0"/>
+        </a:xfrm>
+      </p:grpSpPr>
+      <p:sp>
+        <p:nvSpPr>
+          <p:cNvPr id="2" name="Slide Image Placeholder 1"/>
+          <p:cNvSpPr>
+            <a:spLocks noGrp="1" noRot="1" noChangeAspect="1"/>
+          </p:cNvSpPr>
+          <p:nvPr>
+            <p:ph type="sldImg"/>
+          </p:nvPr>
+        </p:nvSpPr>
+        <p:spPr/>
+      </p:sp>
+      <p:sp>
+        <p:nvSpPr>
+          <p:cNvPr id="3" name="Notes Placeholder 2"/>
+          <p:cNvSpPr>
+            <a:spLocks noGrp="1"/>
+          </p:cNvSpPr>
+          <p:nvPr>
+            <p:ph type="body" idx="1"/>
+          </p:nvPr>
+        </p:nvSpPr>
+        <p:spPr/>
+        <p:txBody>
+          <a:bodyPr/>
+          <a:lstStyle/>
+          <a:p>
+            <a:r>
+              <a:rPr lang="zh-CN" altLang="en-US"/>
+              <a:t>来源：</a:t>
+            </a:r>
+            <a:r>
+              <a:rPr lang="en-US" altLang="zh-CN"/>
+              <a:t>01_</a:t>
+            </a:r>
+            <a:r>
+              <a:rPr lang="zh-CN" altLang="en-US"/>
+              <a:t>文献中的五篇论文与阅读记录。</a:t>
+            </a:r>
+            <a:r>
+              <a:rPr lang="en-US" altLang="zh-CN"/>
+              <a:t>Any-to-Bokeh</a:t>
+            </a:r>
+            <a:r>
+              <a:rPr lang="zh-CN" altLang="en-US"/>
+              <a:t>第</a:t>
+            </a:r>
+            <a:r>
+              <a:rPr lang="en-US" altLang="zh-CN"/>
+              <a:t>5</a:t>
+            </a:r>
+            <a:r>
+              <a:rPr lang="zh-CN" altLang="en-US"/>
+              <a:t>页；</a:t>
+            </a:r>
+            <a:r>
+              <a:rPr lang="en-US" altLang="zh-CN"/>
+              <a:t>MagicBokeh</a:t>
+            </a:r>
+            <a:r>
+              <a:rPr lang="zh-CN" altLang="en-US"/>
+              <a:t>第</a:t>
+            </a:r>
+            <a:r>
+              <a:rPr lang="en-US" altLang="zh-CN"/>
+              <a:t>4–5</a:t>
+            </a:r>
+            <a:r>
+              <a:rPr lang="zh-CN" altLang="en-US"/>
+              <a:t>页；</a:t>
+            </a:r>
+            <a:r>
+              <a:rPr lang="en-US" altLang="zh-CN"/>
+              <a:t>BokehCrafter</a:t>
+            </a:r>
+            <a:r>
+              <a:rPr lang="zh-CN" altLang="en-US"/>
+              <a:t>第</a:t>
+            </a:r>
+            <a:r>
+              <a:rPr lang="en-US" altLang="zh-CN"/>
+              <a:t>5–6</a:t>
+            </a:r>
+            <a:r>
+              <a:rPr lang="zh-CN" altLang="en-US"/>
+              <a:t>页；</a:t>
+            </a:r>
+            <a:r>
+              <a:rPr lang="en-US" altLang="zh-CN"/>
+              <a:t>BokehFlow</a:t>
+            </a:r>
+            <a:r>
+              <a:rPr lang="zh-CN" altLang="en-US"/>
+              <a:t>第</a:t>
+            </a:r>
+            <a:r>
+              <a:rPr lang="en-US" altLang="zh-CN"/>
+              <a:t>4</a:t>
+            </a:r>
+            <a:r>
+              <a:rPr lang="zh-CN" altLang="en-US"/>
+              <a:t>、</a:t>
+            </a:r>
+            <a:r>
+              <a:rPr lang="en-US" altLang="zh-CN"/>
+              <a:t>6–7</a:t>
+            </a:r>
+            <a:r>
+              <a:rPr lang="zh-CN" altLang="en-US"/>
+              <a:t>页；</a:t>
+            </a:r>
+            <a:r>
+              <a:rPr lang="en-US" altLang="zh-CN"/>
+              <a:t>Bokeh Diffusion</a:t>
+            </a:r>
+            <a:r>
+              <a:rPr lang="zh-CN" altLang="en-US"/>
+              <a:t>第</a:t>
+            </a:r>
+            <a:r>
+              <a:rPr lang="en-US" altLang="zh-CN"/>
+              <a:t>1–2</a:t>
+            </a:r>
+            <a:r>
+              <a:rPr lang="zh-CN" altLang="en-US"/>
+              <a:t>页。设计建议结合当前项目提出。</a:t>
             </a:r>
             <a:endParaRPr/>
           </a:p>
@@ -832,19 +1092,103 @@
           <a:p>
             <a:r>
               <a:rPr lang="zh-CN" altLang="en-US"/>
-              <a:t>内容依据：</a:t>
+              <a:t>来源：</a:t>
             </a:r>
             <a:r>
               <a:rPr lang="en-US" altLang="zh-CN"/>
-              <a:t>OPPO_</a:t>
+              <a:t>01_</a:t>
             </a:r>
             <a:r>
               <a:rPr lang="zh-CN" altLang="en-US"/>
-              <a:t>技术路线梳理</a:t>
+              <a:t>文献中的五篇论文与阅读记录。</a:t>
             </a:r>
             <a:r>
               <a:rPr lang="en-US" altLang="zh-CN"/>
-              <a:t>.txt</a:t>
+              <a:t>Any-to-Bokeh</a:t>
+            </a:r>
+            <a:r>
+              <a:rPr lang="zh-CN" altLang="en-US"/>
+              <a:t>第</a:t>
+            </a:r>
+            <a:r>
+              <a:rPr lang="en-US" altLang="zh-CN"/>
+              <a:t>5</a:t>
+            </a:r>
+            <a:r>
+              <a:rPr lang="zh-CN" altLang="en-US"/>
+              <a:t>页；</a:t>
+            </a:r>
+            <a:r>
+              <a:rPr lang="en-US" altLang="zh-CN"/>
+              <a:t>MagicBokeh</a:t>
+            </a:r>
+            <a:r>
+              <a:rPr lang="zh-CN" altLang="en-US"/>
+              <a:t>第</a:t>
+            </a:r>
+            <a:r>
+              <a:rPr lang="en-US" altLang="zh-CN"/>
+              <a:t>4–5</a:t>
+            </a:r>
+            <a:r>
+              <a:rPr lang="zh-CN" altLang="en-US"/>
+              <a:t>页；</a:t>
+            </a:r>
+            <a:r>
+              <a:rPr lang="en-US" altLang="zh-CN"/>
+              <a:t>BokehCrafter</a:t>
+            </a:r>
+            <a:r>
+              <a:rPr lang="zh-CN" altLang="en-US"/>
+              <a:t>第</a:t>
+            </a:r>
+            <a:r>
+              <a:rPr lang="en-US" altLang="zh-CN"/>
+              <a:t>5–6</a:t>
+            </a:r>
+            <a:r>
+              <a:rPr lang="zh-CN" altLang="en-US"/>
+              <a:t>页；</a:t>
+            </a:r>
+            <a:r>
+              <a:rPr lang="en-US" altLang="zh-CN"/>
+              <a:t>BokehFlow</a:t>
+            </a:r>
+            <a:r>
+              <a:rPr lang="zh-CN" altLang="en-US"/>
+              <a:t>第</a:t>
+            </a:r>
+            <a:r>
+              <a:rPr lang="en-US" altLang="zh-CN"/>
+              <a:t>4</a:t>
+            </a:r>
+            <a:r>
+              <a:rPr lang="zh-CN" altLang="en-US"/>
+              <a:t>、</a:t>
+            </a:r>
+            <a:r>
+              <a:rPr lang="en-US" altLang="zh-CN"/>
+              <a:t>6–7</a:t>
+            </a:r>
+            <a:r>
+              <a:rPr lang="zh-CN" altLang="en-US"/>
+              <a:t>页；</a:t>
+            </a:r>
+            <a:r>
+              <a:rPr lang="en-US" altLang="zh-CN"/>
+              <a:t>Bokeh Diffusion</a:t>
+            </a:r>
+            <a:r>
+              <a:rPr lang="zh-CN" altLang="en-US"/>
+              <a:t>第</a:t>
+            </a:r>
+            <a:r>
+              <a:rPr lang="en-US" altLang="zh-CN"/>
+              <a:t>1–2</a:t>
+            </a:r>
+            <a:r>
+              <a:rPr lang="zh-CN" altLang="en-US"/>
+              <a:t>页。设计建议结合当前项目提出。</a:t>
             </a:r>
             <a:endParaRPr/>
           </a:p>
@@ -923,27 +1267,19 @@
           <a:p>
             <a:r>
               <a:rPr lang="zh-CN" altLang="en-US"/>
-              <a:t>依据：</a:t>
+              <a:t>来源：</a:t>
             </a:r>
             <a:r>
               <a:rPr lang="en-US" altLang="zh-CN"/>
-              <a:t>OPPO</a:t>
+              <a:t>01_</a:t>
             </a:r>
             <a:r>
               <a:rPr lang="zh-CN" altLang="en-US"/>
-              <a:t>影像课题提报模板</a:t>
+              <a:t>文献中的五篇论文与阅读记录。</a:t>
             </a:r>
             <a:r>
               <a:rPr lang="en-US" altLang="zh-CN"/>
-              <a:t>_</a:t>
-            </a:r>
-            <a:r>
-              <a:rPr lang="zh-CN" altLang="en-US"/>
-              <a:t>给学生</a:t>
-            </a:r>
-            <a:r>
-              <a:rPr lang="en-US" altLang="zh-CN"/>
-              <a:t>.pdf </a:t>
+              <a:t>Any-to-Bokeh</a:t>
             </a:r>
             <a:r>
               <a:rPr lang="zh-CN" altLang="en-US"/>
@@ -951,7 +1287,7 @@
             </a:r>
             <a:r>
               <a:rPr lang="en-US" altLang="zh-CN"/>
-              <a:t>3–4</a:t>
+              <a:t>5</a:t>
             </a:r>
             <a:r>
               <a:rPr lang="zh-CN" altLang="en-US"/>
@@ -959,19 +1295,75 @@
             </a:r>
             <a:r>
               <a:rPr lang="en-US" altLang="zh-CN"/>
-              <a:t>OPPO_</a:t>
+              <a:t>MagicBokeh</a:t>
             </a:r>
             <a:r>
               <a:rPr lang="zh-CN" altLang="en-US"/>
-              <a:t>技术路线梳理</a:t>
+              <a:t>第</a:t>
             </a:r>
             <a:r>
               <a:rPr lang="en-US" altLang="zh-CN"/>
-              <a:t>.txt</a:t>
+              <a:t>4–5</a:t>
             </a:r>
             <a:r>
               <a:rPr lang="zh-CN" altLang="en-US"/>
-              <a:t>。展示提案中的设计思路，不代表已验证结果。</a:t>
+              <a:t>页；</a:t>
+            </a:r>
+            <a:r>
+              <a:rPr lang="en-US" altLang="zh-CN"/>
+              <a:t>BokehCrafter</a:t>
+            </a:r>
+            <a:r>
+              <a:rPr lang="zh-CN" altLang="en-US"/>
+              <a:t>第</a:t>
+            </a:r>
+            <a:r>
+              <a:rPr lang="en-US" altLang="zh-CN"/>
+              <a:t>5–6</a:t>
+            </a:r>
+            <a:r>
+              <a:rPr lang="zh-CN" altLang="en-US"/>
+              <a:t>页；</a:t>
+            </a:r>
+            <a:r>
+              <a:rPr lang="en-US" altLang="zh-CN"/>
+              <a:t>BokehFlow</a:t>
+            </a:r>
+            <a:r>
+              <a:rPr lang="zh-CN" altLang="en-US"/>
+              <a:t>第</a:t>
+            </a:r>
+            <a:r>
+              <a:rPr lang="en-US" altLang="zh-CN"/>
+              <a:t>4</a:t>
+            </a:r>
+            <a:r>
+              <a:rPr lang="zh-CN" altLang="en-US"/>
+              <a:t>、</a:t>
+            </a:r>
+            <a:r>
+              <a:rPr lang="en-US" altLang="zh-CN"/>
+              <a:t>6–7</a:t>
+            </a:r>
+            <a:r>
+              <a:rPr lang="zh-CN" altLang="en-US"/>
+              <a:t>页；</a:t>
+            </a:r>
+            <a:r>
+              <a:rPr lang="en-US" altLang="zh-CN"/>
+              <a:t>Bokeh Diffusion</a:t>
+            </a:r>
+            <a:r>
+              <a:rPr lang="zh-CN" altLang="en-US"/>
+              <a:t>第</a:t>
+            </a:r>
+            <a:r>
+              <a:rPr lang="en-US" altLang="zh-CN"/>
+              <a:t>1–2</a:t>
+            </a:r>
+            <a:r>
+              <a:rPr lang="zh-CN" altLang="en-US"/>
+              <a:t>页。设计建议结合当前项目提出。</a:t>
             </a:r>
             <a:endParaRPr/>
           </a:p>
@@ -1050,27 +1442,19 @@
           <a:p>
             <a:r>
               <a:rPr lang="zh-CN" altLang="en-US"/>
-              <a:t>依据：</a:t>
+              <a:t>来源：</a:t>
             </a:r>
             <a:r>
               <a:rPr lang="en-US" altLang="zh-CN"/>
-              <a:t>OPPO</a:t>
+              <a:t>01_</a:t>
             </a:r>
             <a:r>
               <a:rPr lang="zh-CN" altLang="en-US"/>
-              <a:t>影像课题提报模板</a:t>
+              <a:t>文献中的五篇论文与阅读记录。</a:t>
             </a:r>
             <a:r>
               <a:rPr lang="en-US" altLang="zh-CN"/>
-              <a:t>_</a:t>
-            </a:r>
-            <a:r>
-              <a:rPr lang="zh-CN" altLang="en-US"/>
-              <a:t>给学生</a:t>
-            </a:r>
-            <a:r>
-              <a:rPr lang="en-US" altLang="zh-CN"/>
-              <a:t>.pdf </a:t>
+              <a:t>Any-to-Bokeh</a:t>
             </a:r>
             <a:r>
               <a:rPr lang="zh-CN" altLang="en-US"/>
@@ -1078,7 +1462,7 @@
             </a:r>
             <a:r>
               <a:rPr lang="en-US" altLang="zh-CN"/>
-              <a:t>3–4</a:t>
+              <a:t>5</a:t>
             </a:r>
             <a:r>
               <a:rPr lang="zh-CN" altLang="en-US"/>
@@ -1086,19 +1470,75 @@
             </a:r>
             <a:r>
               <a:rPr lang="en-US" altLang="zh-CN"/>
-              <a:t>OPPO_</a:t>
+              <a:t>MagicBokeh</a:t>
             </a:r>
             <a:r>
               <a:rPr lang="zh-CN" altLang="en-US"/>
-              <a:t>技术路线梳理</a:t>
+              <a:t>第</a:t>
             </a:r>
             <a:r>
               <a:rPr lang="en-US" altLang="zh-CN"/>
-              <a:t>.txt</a:t>
+              <a:t>4–5</a:t>
             </a:r>
             <a:r>
               <a:rPr lang="zh-CN" altLang="en-US"/>
-              <a:t>。展示提案中的设计思路，不代表已验证结果。</a:t>
+              <a:t>页；</a:t>
+            </a:r>
+            <a:r>
+              <a:rPr lang="en-US" altLang="zh-CN"/>
+              <a:t>BokehCrafter</a:t>
+            </a:r>
+            <a:r>
+              <a:rPr lang="zh-CN" altLang="en-US"/>
+              <a:t>第</a:t>
+            </a:r>
+            <a:r>
+              <a:rPr lang="en-US" altLang="zh-CN"/>
+              <a:t>5–6</a:t>
+            </a:r>
+            <a:r>
+              <a:rPr lang="zh-CN" altLang="en-US"/>
+              <a:t>页；</a:t>
+            </a:r>
+            <a:r>
+              <a:rPr lang="en-US" altLang="zh-CN"/>
+              <a:t>BokehFlow</a:t>
+            </a:r>
+            <a:r>
+              <a:rPr lang="zh-CN" altLang="en-US"/>
+              <a:t>第</a:t>
+            </a:r>
+            <a:r>
+              <a:rPr lang="en-US" altLang="zh-CN"/>
+              <a:t>4</a:t>
+            </a:r>
+            <a:r>
+              <a:rPr lang="zh-CN" altLang="en-US"/>
+              <a:t>、</a:t>
+            </a:r>
+            <a:r>
+              <a:rPr lang="en-US" altLang="zh-CN"/>
+              <a:t>6–7</a:t>
+            </a:r>
+            <a:r>
+              <a:rPr lang="zh-CN" altLang="en-US"/>
+              <a:t>页；</a:t>
+            </a:r>
+            <a:r>
+              <a:rPr lang="en-US" altLang="zh-CN"/>
+              <a:t>Bokeh Diffusion</a:t>
+            </a:r>
+            <a:r>
+              <a:rPr lang="zh-CN" altLang="en-US"/>
+              <a:t>第</a:t>
+            </a:r>
+            <a:r>
+              <a:rPr lang="en-US" altLang="zh-CN"/>
+              <a:t>1–2</a:t>
+            </a:r>
+            <a:r>
+              <a:rPr lang="zh-CN" altLang="en-US"/>
+              <a:t>页。设计建议结合当前项目提出。</a:t>
             </a:r>
             <a:endParaRPr/>
           </a:p>
@@ -1177,27 +1617,19 @@
           <a:p>
             <a:r>
               <a:rPr lang="zh-CN" altLang="en-US"/>
-              <a:t>依据：</a:t>
+              <a:t>来源：</a:t>
             </a:r>
             <a:r>
               <a:rPr lang="en-US" altLang="zh-CN"/>
-              <a:t>OPPO</a:t>
+              <a:t>01_</a:t>
             </a:r>
             <a:r>
               <a:rPr lang="zh-CN" altLang="en-US"/>
-              <a:t>影像课题提报模板</a:t>
+              <a:t>文献中的五篇论文与阅读记录。</a:t>
             </a:r>
             <a:r>
               <a:rPr lang="en-US" altLang="zh-CN"/>
-              <a:t>_</a:t>
-            </a:r>
-            <a:r>
-              <a:rPr lang="zh-CN" altLang="en-US"/>
-              <a:t>给学生</a:t>
-            </a:r>
-            <a:r>
-              <a:rPr lang="en-US" altLang="zh-CN"/>
-              <a:t>.pdf </a:t>
+              <a:t>Any-to-Bokeh</a:t>
             </a:r>
             <a:r>
               <a:rPr lang="zh-CN" altLang="en-US"/>
@@ -1205,7 +1637,7 @@
             </a:r>
             <a:r>
               <a:rPr lang="en-US" altLang="zh-CN"/>
-              <a:t>3–4</a:t>
+              <a:t>5</a:t>
             </a:r>
             <a:r>
               <a:rPr lang="zh-CN" altLang="en-US"/>
@@ -1213,19 +1645,75 @@
             </a:r>
             <a:r>
               <a:rPr lang="en-US" altLang="zh-CN"/>
-              <a:t>OPPO_</a:t>
+              <a:t>MagicBokeh</a:t>
             </a:r>
             <a:r>
               <a:rPr lang="zh-CN" altLang="en-US"/>
-              <a:t>技术路线梳理</a:t>
+              <a:t>第</a:t>
             </a:r>
             <a:r>
               <a:rPr lang="en-US" altLang="zh-CN"/>
-              <a:t>.txt</a:t>
+              <a:t>4–5</a:t>
             </a:r>
             <a:r>
               <a:rPr lang="zh-CN" altLang="en-US"/>
-              <a:t>。展示提案中的设计思路，不代表已验证结果。</a:t>
+              <a:t>页；</a:t>
+            </a:r>
+            <a:r>
+              <a:rPr lang="en-US" altLang="zh-CN"/>
+              <a:t>BokehCrafter</a:t>
+            </a:r>
+            <a:r>
+              <a:rPr lang="zh-CN" altLang="en-US"/>
+              <a:t>第</a:t>
+            </a:r>
+            <a:r>
+              <a:rPr lang="en-US" altLang="zh-CN"/>
+              <a:t>5–6</a:t>
+            </a:r>
+            <a:r>
+              <a:rPr lang="zh-CN" altLang="en-US"/>
+              <a:t>页；</a:t>
+            </a:r>
+            <a:r>
+              <a:rPr lang="en-US" altLang="zh-CN"/>
+              <a:t>BokehFlow</a:t>
+            </a:r>
+            <a:r>
+              <a:rPr lang="zh-CN" altLang="en-US"/>
+              <a:t>第</a:t>
+            </a:r>
+            <a:r>
+              <a:rPr lang="en-US" altLang="zh-CN"/>
+              <a:t>4</a:t>
+            </a:r>
+            <a:r>
+              <a:rPr lang="zh-CN" altLang="en-US"/>
+              <a:t>、</a:t>
+            </a:r>
+            <a:r>
+              <a:rPr lang="en-US" altLang="zh-CN"/>
+              <a:t>6–7</a:t>
+            </a:r>
+            <a:r>
+              <a:rPr lang="zh-CN" altLang="en-US"/>
+              <a:t>页；</a:t>
+            </a:r>
+            <a:r>
+              <a:rPr lang="en-US" altLang="zh-CN"/>
+              <a:t>Bokeh Diffusion</a:t>
+            </a:r>
+            <a:r>
+              <a:rPr lang="zh-CN" altLang="en-US"/>
+              <a:t>第</a:t>
+            </a:r>
+            <a:r>
+              <a:rPr lang="en-US" altLang="zh-CN"/>
+              <a:t>1–2</a:t>
+            </a:r>
+            <a:r>
+              <a:rPr lang="zh-CN" altLang="en-US"/>
+              <a:t>页。设计建议结合当前项目提出。</a:t>
             </a:r>
             <a:endParaRPr/>
           </a:p>
@@ -1304,27 +1792,19 @@
           <a:p>
             <a:r>
               <a:rPr lang="zh-CN" altLang="en-US"/>
-              <a:t>依据：</a:t>
+              <a:t>来源：</a:t>
             </a:r>
             <a:r>
               <a:rPr lang="en-US" altLang="zh-CN"/>
-              <a:t>OPPO</a:t>
+              <a:t>01_</a:t>
             </a:r>
             <a:r>
               <a:rPr lang="zh-CN" altLang="en-US"/>
-              <a:t>影像课题提报模板</a:t>
+              <a:t>文献中的五篇论文与阅读记录。</a:t>
             </a:r>
             <a:r>
               <a:rPr lang="en-US" altLang="zh-CN"/>
-              <a:t>_</a:t>
-            </a:r>
-            <a:r>
-              <a:rPr lang="zh-CN" altLang="en-US"/>
-              <a:t>给学生</a:t>
-            </a:r>
-            <a:r>
-              <a:rPr lang="en-US" altLang="zh-CN"/>
-              <a:t>.pdf </a:t>
+              <a:t>Any-to-Bokeh</a:t>
             </a:r>
             <a:r>
               <a:rPr lang="zh-CN" altLang="en-US"/>
@@ -1332,7 +1812,7 @@
             </a:r>
             <a:r>
               <a:rPr lang="en-US" altLang="zh-CN"/>
-              <a:t>3–4</a:t>
+              <a:t>5</a:t>
             </a:r>
             <a:r>
               <a:rPr lang="zh-CN" altLang="en-US"/>
@@ -1340,19 +1820,75 @@
             </a:r>
             <a:r>
               <a:rPr lang="en-US" altLang="zh-CN"/>
-              <a:t>OPPO_</a:t>
+              <a:t>MagicBokeh</a:t>
             </a:r>
             <a:r>
               <a:rPr lang="zh-CN" altLang="en-US"/>
-              <a:t>技术路线梳理</a:t>
+              <a:t>第</a:t>
             </a:r>
             <a:r>
               <a:rPr lang="en-US" altLang="zh-CN"/>
-              <a:t>.txt</a:t>
+              <a:t>4–5</a:t>
             </a:r>
             <a:r>
               <a:rPr lang="zh-CN" altLang="en-US"/>
-              <a:t>。展示提案中的设计思路，不代表已验证结果。</a:t>
+              <a:t>页；</a:t>
+            </a:r>
+            <a:r>
+              <a:rPr lang="en-US" altLang="zh-CN"/>
+              <a:t>BokehCrafter</a:t>
+            </a:r>
+            <a:r>
+              <a:rPr lang="zh-CN" altLang="en-US"/>
+              <a:t>第</a:t>
+            </a:r>
+            <a:r>
+              <a:rPr lang="en-US" altLang="zh-CN"/>
+              <a:t>5–6</a:t>
+            </a:r>
+            <a:r>
+              <a:rPr lang="zh-CN" altLang="en-US"/>
+              <a:t>页；</a:t>
+            </a:r>
+            <a:r>
+              <a:rPr lang="en-US" altLang="zh-CN"/>
+              <a:t>BokehFlow</a:t>
+            </a:r>
+            <a:r>
+              <a:rPr lang="zh-CN" altLang="en-US"/>
+              <a:t>第</a:t>
+            </a:r>
+            <a:r>
+              <a:rPr lang="en-US" altLang="zh-CN"/>
+              <a:t>4</a:t>
+            </a:r>
+            <a:r>
+              <a:rPr lang="zh-CN" altLang="en-US"/>
+              <a:t>、</a:t>
+            </a:r>
+            <a:r>
+              <a:rPr lang="en-US" altLang="zh-CN"/>
+              <a:t>6–7</a:t>
+            </a:r>
+            <a:r>
+              <a:rPr lang="zh-CN" altLang="en-US"/>
+              <a:t>页；</a:t>
+            </a:r>
+            <a:r>
+              <a:rPr lang="en-US" altLang="zh-CN"/>
+              <a:t>Bokeh Diffusion</a:t>
+            </a:r>
+            <a:r>
+              <a:rPr lang="zh-CN" altLang="en-US"/>
+              <a:t>第</a:t>
+            </a:r>
+            <a:r>
+              <a:rPr lang="en-US" altLang="zh-CN"/>
+              <a:t>1–2</a:t>
+            </a:r>
+            <a:r>
+              <a:rPr lang="zh-CN" altLang="en-US"/>
+              <a:t>页。设计建议结合当前项目提出。</a:t>
             </a:r>
             <a:endParaRPr/>
           </a:p>
@@ -8460,7 +8996,7 @@
                 <a:ea typeface="Microsoft YaHei"/>
                 <a:cs typeface="Microsoft YaHei"/>
               </a:rPr>
-              <a:t>后续文献调研</a:t>
+              <a:t>已读文献</a:t>
             </a:r>
             <a:endParaRPr sz="2850" b="1">
               <a:solidFill>
@@ -8547,10 +9083,10 @@
       </p:sp>
       <p:sp>
         <p:nvSpPr>
-          <p:cNvPr id="30" name="矩形 29">
-            <a:extLst>
-              <a:ext uri="{FF2B5EF4-FFF2-40B4-BE49-F238E27FC236}">
-                <a16:creationId xmlns:a16="http://schemas.microsoft.com/office/drawing/2014/main" id="{76D126E8-D108-D45B-1D05-FF911E3F5DA4}"/>
+          <p:cNvPr id="2" name="矩形 1">
+            <a:extLst>
+              <a:ext uri="{FF2B5EF4-FFF2-40B4-BE49-F238E27FC236}">
+                <a16:creationId xmlns:a16="http://schemas.microsoft.com/office/drawing/2014/main" id="{7DD3EA85-5159-C68D-6F0F-50A9AED73461}"/>
               </a:ext>
             </a:extLst>
           </p:cNvPr>
@@ -8561,8 +9097,8 @@
         </p:nvSpPr>
         <p:spPr>
           <a:xfrm>
-            <a:off x="781050" y="1314450"/>
-            <a:ext cx="2733675" cy="428625"/>
+            <a:off x="781050" y="1228725"/>
+            <a:ext cx="2619375" cy="428625"/>
           </a:xfrm>
           <a:prstGeom prst="rect">
             <a:avLst/>
@@ -8578,7 +9114,7 @@
           </a:bodyPr>
           <a:lstStyle/>
           <a:p>
-            <a:pPr algn="l">
+            <a:pPr>
               <a:defRPr sz="1950" b="1">
                 <a:solidFill>
                   <a:srgbClr val="0D569A"/>
@@ -8597,17 +9133,17 @@
                 <a:ea typeface="Microsoft YaHei"/>
                 <a:cs typeface="Microsoft YaHei"/>
               </a:rPr>
-              <a:t>深度输入编码</a:t>
-            </a:r>
-          </a:p>
-        </p:txBody>
-      </p:sp>
-      <p:sp>
-        <p:nvSpPr>
-          <p:cNvPr id="31" name="矩形 30">
-            <a:extLst>
-              <a:ext uri="{FF2B5EF4-FFF2-40B4-BE49-F238E27FC236}">
-                <a16:creationId xmlns:a16="http://schemas.microsoft.com/office/drawing/2014/main" id="{3452CFA0-AFFA-1649-93FA-3C4787C8BE98}"/>
+              <a:t>文献</a:t>
+            </a:r>
+          </a:p>
+        </p:txBody>
+      </p:sp>
+      <p:sp>
+        <p:nvSpPr>
+          <p:cNvPr id="4" name="矩形 3">
+            <a:extLst>
+              <a:ext uri="{FF2B5EF4-FFF2-40B4-BE49-F238E27FC236}">
+                <a16:creationId xmlns:a16="http://schemas.microsoft.com/office/drawing/2014/main" id="{50F45C0C-0BA1-DB9D-D2D2-1383B50CC9F8}"/>
               </a:ext>
             </a:extLst>
           </p:cNvPr>
@@ -8618,8 +9154,8 @@
         </p:nvSpPr>
         <p:spPr>
           <a:xfrm>
-            <a:off x="3714750" y="1314450"/>
-            <a:ext cx="7715250" cy="495300"/>
+            <a:off x="3533775" y="1228725"/>
+            <a:ext cx="3686175" cy="428625"/>
           </a:xfrm>
           <a:prstGeom prst="rect">
             <a:avLst/>
@@ -8635,36 +9171,36 @@
           </a:bodyPr>
           <a:lstStyle/>
           <a:p>
-            <a:pPr algn="l">
-              <a:defRPr sz="1875" b="0">
-                <a:solidFill>
-                  <a:srgbClr val="101F37"/>
-                </a:solidFill>
-                <a:latin typeface="Microsoft YaHei"/>
-                <a:ea typeface="Microsoft YaHei"/>
-                <a:cs typeface="Microsoft YaHei"/>
-              </a:defRPr>
-            </a:pPr>
-            <a:r>
-              <a:rPr sz="1875" b="0">
-                <a:solidFill>
-                  <a:srgbClr val="101F37"/>
-                </a:solidFill>
-                <a:latin typeface="Microsoft YaHei"/>
-                <a:ea typeface="Microsoft YaHei"/>
-                <a:cs typeface="Microsoft YaHei"/>
-              </a:rPr>
-              <a:t>D、M、C如何组合并参与计算</a:t>
-            </a:r>
-          </a:p>
-        </p:txBody>
-      </p:sp>
-      <p:sp>
-        <p:nvSpPr>
-          <p:cNvPr id="32" name="矩形 31">
-            <a:extLst>
-              <a:ext uri="{FF2B5EF4-FFF2-40B4-BE49-F238E27FC236}">
-                <a16:creationId xmlns:a16="http://schemas.microsoft.com/office/drawing/2014/main" id="{B6F637BF-B468-F0BE-0B93-C12B982E3C49}"/>
+            <a:pPr>
+              <a:defRPr sz="1950" b="1">
+                <a:solidFill>
+                  <a:srgbClr val="0D569A"/>
+                </a:solidFill>
+                <a:latin typeface="Microsoft YaHei"/>
+                <a:ea typeface="Microsoft YaHei"/>
+                <a:cs typeface="Microsoft YaHei"/>
+              </a:defRPr>
+            </a:pPr>
+            <a:r>
+              <a:rPr sz="1950" b="1">
+                <a:solidFill>
+                  <a:srgbClr val="0D569A"/>
+                </a:solidFill>
+                <a:latin typeface="Microsoft YaHei"/>
+                <a:ea typeface="Microsoft YaHei"/>
+                <a:cs typeface="Microsoft YaHei"/>
+              </a:rPr>
+              <a:t>输入与主要方法</a:t>
+            </a:r>
+          </a:p>
+        </p:txBody>
+      </p:sp>
+      <p:sp>
+        <p:nvSpPr>
+          <p:cNvPr id="5" name="矩形 4">
+            <a:extLst>
+              <a:ext uri="{FF2B5EF4-FFF2-40B4-BE49-F238E27FC236}">
+                <a16:creationId xmlns:a16="http://schemas.microsoft.com/office/drawing/2014/main" id="{37A27899-E34E-89FA-58FB-D0FCAFB6B178}"/>
               </a:ext>
             </a:extLst>
           </p:cNvPr>
@@ -8675,8 +9211,8 @@
         </p:nvSpPr>
         <p:spPr>
           <a:xfrm>
-            <a:off x="781050" y="2105025"/>
-            <a:ext cx="2733675" cy="428625"/>
+            <a:off x="7448550" y="1228725"/>
+            <a:ext cx="3952875" cy="428625"/>
           </a:xfrm>
           <a:prstGeom prst="rect">
             <a:avLst/>
@@ -8692,7 +9228,7 @@
           </a:bodyPr>
           <a:lstStyle/>
           <a:p>
-            <a:pPr algn="l">
+            <a:pPr>
               <a:defRPr sz="1950" b="1">
                 <a:solidFill>
                   <a:srgbClr val="0D569A"/>
@@ -8711,17 +9247,17 @@
                 <a:ea typeface="Microsoft YaHei"/>
                 <a:cs typeface="Microsoft YaHei"/>
               </a:rPr>
-              <a:t>时间对齐与传播</a:t>
-            </a:r>
-          </a:p>
-        </p:txBody>
-      </p:sp>
-      <p:sp>
-        <p:nvSpPr>
-          <p:cNvPr id="33" name="矩形 32">
-            <a:extLst>
-              <a:ext uri="{FF2B5EF4-FFF2-40B4-BE49-F238E27FC236}">
-                <a16:creationId xmlns:a16="http://schemas.microsoft.com/office/drawing/2014/main" id="{40D28070-F121-9282-93DE-80B34B8C6406}"/>
+              <a:t>可参考的做法</a:t>
+            </a:r>
+          </a:p>
+        </p:txBody>
+      </p:sp>
+      <p:sp>
+        <p:nvSpPr>
+          <p:cNvPr id="6" name="矩形 5">
+            <a:extLst>
+              <a:ext uri="{FF2B5EF4-FFF2-40B4-BE49-F238E27FC236}">
+                <a16:creationId xmlns:a16="http://schemas.microsoft.com/office/drawing/2014/main" id="{36DDEDA1-7CBE-2465-9AF4-5C3A809E2233}"/>
               </a:ext>
             </a:extLst>
           </p:cNvPr>
@@ -8732,8 +9268,8 @@
         </p:nvSpPr>
         <p:spPr>
           <a:xfrm>
-            <a:off x="3714750" y="2105025"/>
-            <a:ext cx="7715250" cy="495300"/>
+            <a:off x="781050" y="1857375"/>
+            <a:ext cx="2667000" cy="619125"/>
           </a:xfrm>
           <a:prstGeom prst="rect">
             <a:avLst/>
@@ -8749,36 +9285,36 @@
           </a:bodyPr>
           <a:lstStyle/>
           <a:p>
-            <a:pPr algn="l">
-              <a:defRPr sz="1875" b="0">
-                <a:solidFill>
-                  <a:srgbClr val="101F37"/>
-                </a:solidFill>
-                <a:latin typeface="Microsoft YaHei"/>
-                <a:ea typeface="Microsoft YaHei"/>
-                <a:cs typeface="Microsoft YaHei"/>
-              </a:defRPr>
-            </a:pPr>
-            <a:r>
-              <a:rPr sz="1875" b="0">
-                <a:solidFill>
-                  <a:srgbClr val="101F37"/>
-                </a:solidFill>
-                <a:latin typeface="Microsoft YaHei"/>
-                <a:ea typeface="Microsoft YaHei"/>
-                <a:cs typeface="Microsoft YaHei"/>
-              </a:rPr>
-              <a:t>插值和运动传播如何分工</a:t>
-            </a:r>
-          </a:p>
-        </p:txBody>
-      </p:sp>
-      <p:sp>
-        <p:nvSpPr>
-          <p:cNvPr id="34" name="矩形 33">
-            <a:extLst>
-              <a:ext uri="{FF2B5EF4-FFF2-40B4-BE49-F238E27FC236}">
-                <a16:creationId xmlns:a16="http://schemas.microsoft.com/office/drawing/2014/main" id="{2D372892-C919-020A-43A9-1023C91A7EAC}"/>
+            <a:pPr>
+              <a:defRPr sz="1875" b="1">
+                <a:solidFill>
+                  <a:srgbClr val="0D569A"/>
+                </a:solidFill>
+                <a:latin typeface="Microsoft YaHei"/>
+                <a:ea typeface="Microsoft YaHei"/>
+                <a:cs typeface="Microsoft YaHei"/>
+              </a:defRPr>
+            </a:pPr>
+            <a:r>
+              <a:rPr sz="1875" b="1">
+                <a:solidFill>
+                  <a:srgbClr val="0D569A"/>
+                </a:solidFill>
+                <a:latin typeface="Microsoft YaHei"/>
+                <a:ea typeface="Microsoft YaHei"/>
+                <a:cs typeface="Microsoft YaHei"/>
+              </a:rPr>
+              <a:t>BokehFlow</a:t>
+            </a:r>
+          </a:p>
+        </p:txBody>
+      </p:sp>
+      <p:sp>
+        <p:nvSpPr>
+          <p:cNvPr id="7" name="矩形 6">
+            <a:extLst>
+              <a:ext uri="{FF2B5EF4-FFF2-40B4-BE49-F238E27FC236}">
+                <a16:creationId xmlns:a16="http://schemas.microsoft.com/office/drawing/2014/main" id="{B9E223C2-18E8-1FC5-21C0-2100AAF4692B}"/>
               </a:ext>
             </a:extLst>
           </p:cNvPr>
@@ -8789,8 +9325,8 @@
         </p:nvSpPr>
         <p:spPr>
           <a:xfrm>
-            <a:off x="781050" y="2895600"/>
-            <a:ext cx="2733675" cy="428625"/>
+            <a:off x="3533775" y="1857375"/>
+            <a:ext cx="3714750" cy="619125"/>
           </a:xfrm>
           <a:prstGeom prst="rect">
             <a:avLst/>
@@ -8806,36 +9342,59 @@
           </a:bodyPr>
           <a:lstStyle/>
           <a:p>
-            <a:pPr algn="l">
-              <a:defRPr sz="1950" b="1">
-                <a:solidFill>
-                  <a:srgbClr val="0D569A"/>
-                </a:solidFill>
-                <a:latin typeface="Microsoft YaHei"/>
-                <a:ea typeface="Microsoft YaHei"/>
-                <a:cs typeface="Microsoft YaHei"/>
-              </a:defRPr>
-            </a:pPr>
-            <a:r>
-              <a:rPr sz="1950" b="1">
-                <a:solidFill>
-                  <a:srgbClr val="0D569A"/>
-                </a:solidFill>
-                <a:latin typeface="Microsoft YaHei"/>
-                <a:ea typeface="Microsoft YaHei"/>
-                <a:cs typeface="Microsoft YaHei"/>
-              </a:rPr>
-              <a:t>特征合并</a:t>
-            </a:r>
-          </a:p>
-        </p:txBody>
-      </p:sp>
-      <p:sp>
-        <p:nvSpPr>
-          <p:cNvPr id="35" name="矩形 34">
-            <a:extLst>
-              <a:ext uri="{FF2B5EF4-FFF2-40B4-BE49-F238E27FC236}">
-                <a16:creationId xmlns:a16="http://schemas.microsoft.com/office/drawing/2014/main" id="{EF5A4F72-782A-2B53-BEED-93B65D06EC7D}"/>
+            <a:pPr>
+              <a:defRPr sz="1725" b="0">
+                <a:solidFill>
+                  <a:srgbClr val="101F37"/>
+                </a:solidFill>
+                <a:latin typeface="Microsoft YaHei"/>
+                <a:ea typeface="Microsoft YaHei"/>
+                <a:cs typeface="Microsoft YaHei"/>
+              </a:defRPr>
+            </a:pPr>
+            <a:r>
+              <a:rPr sz="1725" b="0">
+                <a:solidFill>
+                  <a:srgbClr val="101F37"/>
+                </a:solidFill>
+                <a:latin typeface="Microsoft YaHei"/>
+                <a:ea typeface="Microsoft YaHei"/>
+                <a:cs typeface="Microsoft YaHei"/>
+              </a:rPr>
+              <a:t>单图 + 对焦与虚化控制</a:t>
+            </a:r>
+          </a:p>
+          <a:p>
+            <a:pPr>
+              <a:defRPr sz="1725" b="0">
+                <a:solidFill>
+                  <a:srgbClr val="101F37"/>
+                </a:solidFill>
+                <a:latin typeface="Microsoft YaHei"/>
+                <a:ea typeface="Microsoft YaHei"/>
+                <a:cs typeface="Microsoft YaHei"/>
+              </a:defRPr>
+            </a:pPr>
+            <a:r>
+              <a:rPr sz="1725" b="0">
+                <a:solidFill>
+                  <a:srgbClr val="101F37"/>
+                </a:solidFill>
+                <a:latin typeface="Microsoft YaHei"/>
+                <a:ea typeface="Microsoft YaHei"/>
+                <a:cs typeface="Microsoft YaHei"/>
+              </a:rPr>
+              <a:t>流匹配生成虚化图像</a:t>
+            </a:r>
+          </a:p>
+        </p:txBody>
+      </p:sp>
+      <p:sp>
+        <p:nvSpPr>
+          <p:cNvPr id="8" name="矩形 7">
+            <a:extLst>
+              <a:ext uri="{FF2B5EF4-FFF2-40B4-BE49-F238E27FC236}">
+                <a16:creationId xmlns:a16="http://schemas.microsoft.com/office/drawing/2014/main" id="{62B51B34-3432-EFD4-5507-0329C75345F2}"/>
               </a:ext>
             </a:extLst>
           </p:cNvPr>
@@ -8846,8 +9405,8 @@
         </p:nvSpPr>
         <p:spPr>
           <a:xfrm>
-            <a:off x="3714750" y="2895600"/>
-            <a:ext cx="7715250" cy="495300"/>
+            <a:off x="7448550" y="1857375"/>
+            <a:ext cx="4000500" cy="619125"/>
           </a:xfrm>
           <a:prstGeom prst="rect">
             <a:avLst/>
@@ -8863,36 +9422,59 @@
           </a:bodyPr>
           <a:lstStyle/>
           <a:p>
-            <a:pPr algn="l">
-              <a:defRPr sz="1875" b="0">
-                <a:solidFill>
-                  <a:srgbClr val="101F37"/>
-                </a:solidFill>
-                <a:latin typeface="Microsoft YaHei"/>
-                <a:ea typeface="Microsoft YaHei"/>
-                <a:cs typeface="Microsoft YaHei"/>
-              </a:defRPr>
-            </a:pPr>
-            <a:r>
-              <a:rPr sz="1875" b="0">
-                <a:solidFill>
-                  <a:srgbClr val="101F37"/>
-                </a:solidFill>
-                <a:latin typeface="Microsoft YaHei"/>
-                <a:ea typeface="Microsoft YaHei"/>
-                <a:cs typeface="Microsoft YaHei"/>
-              </a:rPr>
-              <a:t>怎样减少重复计算并保留边缘细节</a:t>
-            </a:r>
-          </a:p>
-        </p:txBody>
-      </p:sp>
-      <p:sp>
-        <p:nvSpPr>
-          <p:cNvPr id="36" name="矩形 35">
-            <a:extLst>
-              <a:ext uri="{FF2B5EF4-FFF2-40B4-BE49-F238E27FC236}">
-                <a16:creationId xmlns:a16="http://schemas.microsoft.com/office/drawing/2014/main" id="{067E9B1E-509A-FD6E-D782-2C9258F910B4}"/>
+            <a:pPr>
+              <a:defRPr sz="1725" b="0">
+                <a:solidFill>
+                  <a:srgbClr val="101F37"/>
+                </a:solidFill>
+                <a:latin typeface="Microsoft YaHei"/>
+                <a:ea typeface="Microsoft YaHei"/>
+                <a:cs typeface="Microsoft YaHei"/>
+              </a:defRPr>
+            </a:pPr>
+            <a:r>
+              <a:rPr sz="1725" b="0">
+                <a:solidFill>
+                  <a:srgbClr val="101F37"/>
+                </a:solidFill>
+                <a:latin typeface="Microsoft YaHei"/>
+                <a:ea typeface="Microsoft YaHei"/>
+                <a:cs typeface="Microsoft YaHei"/>
+              </a:rPr>
+              <a:t>几何预训练、合成数据</a:t>
+            </a:r>
+          </a:p>
+          <a:p>
+            <a:pPr>
+              <a:defRPr sz="1725" b="0">
+                <a:solidFill>
+                  <a:srgbClr val="101F37"/>
+                </a:solidFill>
+                <a:latin typeface="Microsoft YaHei"/>
+                <a:ea typeface="Microsoft YaHei"/>
+                <a:cs typeface="Microsoft YaHei"/>
+              </a:defRPr>
+            </a:pPr>
+            <a:r>
+              <a:rPr sz="1725" b="0">
+                <a:solidFill>
+                  <a:srgbClr val="101F37"/>
+                </a:solidFill>
+                <a:latin typeface="Microsoft YaHei"/>
+                <a:ea typeface="Microsoft YaHei"/>
+                <a:cs typeface="Microsoft YaHei"/>
+              </a:rPr>
+              <a:t>边缘区域评价</a:t>
+            </a:r>
+          </a:p>
+        </p:txBody>
+      </p:sp>
+      <p:sp>
+        <p:nvSpPr>
+          <p:cNvPr id="9" name="矩形 8">
+            <a:extLst>
+              <a:ext uri="{FF2B5EF4-FFF2-40B4-BE49-F238E27FC236}">
+                <a16:creationId xmlns:a16="http://schemas.microsoft.com/office/drawing/2014/main" id="{2BF8A9FD-A254-A38B-A1C6-2167A5642E9F}"/>
               </a:ext>
             </a:extLst>
           </p:cNvPr>
@@ -8903,8 +9485,8 @@
         </p:nvSpPr>
         <p:spPr>
           <a:xfrm>
-            <a:off x="781050" y="3686175"/>
-            <a:ext cx="2733675" cy="428625"/>
+            <a:off x="781050" y="2667000"/>
+            <a:ext cx="2667000" cy="619125"/>
           </a:xfrm>
           <a:prstGeom prst="rect">
             <a:avLst/>
@@ -8920,8 +9502,8 @@
           </a:bodyPr>
           <a:lstStyle/>
           <a:p>
-            <a:pPr algn="l">
-              <a:defRPr sz="1950" b="1">
+            <a:pPr>
+              <a:defRPr sz="1875" b="1">
                 <a:solidFill>
                   <a:srgbClr val="0D569A"/>
                 </a:solidFill>
@@ -8931,7 +9513,7 @@
               </a:defRPr>
             </a:pPr>
             <a:r>
-              <a:rPr sz="1950" b="1">
+              <a:rPr sz="1875" b="1">
                 <a:solidFill>
                   <a:srgbClr val="0D569A"/>
                 </a:solidFill>
@@ -8939,17 +9521,17 @@
                 <a:ea typeface="Microsoft YaHei"/>
                 <a:cs typeface="Microsoft YaHei"/>
               </a:rPr>
-              <a:t>边界与虚化渲染</a:t>
-            </a:r>
-          </a:p>
-        </p:txBody>
-      </p:sp>
-      <p:sp>
-        <p:nvSpPr>
-          <p:cNvPr id="37" name="矩形 36">
-            <a:extLst>
-              <a:ext uri="{FF2B5EF4-FFF2-40B4-BE49-F238E27FC236}">
-                <a16:creationId xmlns:a16="http://schemas.microsoft.com/office/drawing/2014/main" id="{F421EA0C-5504-B2D9-718F-47FB7B18FC56}"/>
+              <a:t>BokehCrafter</a:t>
+            </a:r>
+          </a:p>
+        </p:txBody>
+      </p:sp>
+      <p:sp>
+        <p:nvSpPr>
+          <p:cNvPr id="10" name="矩形 9">
+            <a:extLst>
+              <a:ext uri="{FF2B5EF4-FFF2-40B4-BE49-F238E27FC236}">
+                <a16:creationId xmlns:a16="http://schemas.microsoft.com/office/drawing/2014/main" id="{F845FCE7-889A-F0F2-81EC-54F7D408ECCF}"/>
               </a:ext>
             </a:extLst>
           </p:cNvPr>
@@ -8960,8 +9542,8 @@
         </p:nvSpPr>
         <p:spPr>
           <a:xfrm>
-            <a:off x="3714750" y="3686175"/>
-            <a:ext cx="7715250" cy="495300"/>
+            <a:off x="3533775" y="2667000"/>
+            <a:ext cx="3714750" cy="619125"/>
           </a:xfrm>
           <a:prstGeom prst="rect">
             <a:avLst/>
@@ -8977,36 +9559,59 @@
           </a:bodyPr>
           <a:lstStyle/>
           <a:p>
-            <a:pPr algn="l">
-              <a:defRPr sz="1875" b="0">
-                <a:solidFill>
-                  <a:srgbClr val="101F37"/>
-                </a:solidFill>
-                <a:latin typeface="Microsoft YaHei"/>
-                <a:ea typeface="Microsoft YaHei"/>
-                <a:cs typeface="Microsoft YaHei"/>
-              </a:defRPr>
-            </a:pPr>
-            <a:r>
-              <a:rPr sz="1875" b="0">
-                <a:solidFill>
-                  <a:srgbClr val="101F37"/>
-                </a:solidFill>
-                <a:latin typeface="Microsoft YaHei"/>
-                <a:ea typeface="Microsoft YaHei"/>
-                <a:cs typeface="Microsoft YaHei"/>
-              </a:rPr>
-              <a:t>Alpha之外是否还需要前景颜色和背景信息</a:t>
-            </a:r>
-          </a:p>
-        </p:txBody>
-      </p:sp>
-      <p:sp>
-        <p:nvSpPr>
-          <p:cNvPr id="38" name="矩形 37">
-            <a:extLst>
-              <a:ext uri="{FF2B5EF4-FFF2-40B4-BE49-F238E27FC236}">
-                <a16:creationId xmlns:a16="http://schemas.microsoft.com/office/drawing/2014/main" id="{53E70CCD-4008-01C9-8908-ABFA81C541EE}"/>
+            <a:pPr>
+              <a:defRPr sz="1725" b="0">
+                <a:solidFill>
+                  <a:srgbClr val="101F37"/>
+                </a:solidFill>
+                <a:latin typeface="Microsoft YaHei"/>
+                <a:ea typeface="Microsoft YaHei"/>
+                <a:cs typeface="Microsoft YaHei"/>
+              </a:defRPr>
+            </a:pPr>
+            <a:r>
+              <a:rPr sz="1725" b="0">
+                <a:solidFill>
+                  <a:srgbClr val="101F37"/>
+                </a:solidFill>
+                <a:latin typeface="Microsoft YaHei"/>
+                <a:ea typeface="Microsoft YaHei"/>
+                <a:cs typeface="Microsoft YaHei"/>
+              </a:rPr>
+              <a:t>视频 + 参考虚化图 + 文本</a:t>
+            </a:r>
+          </a:p>
+          <a:p>
+            <a:pPr>
+              <a:defRPr sz="1725" b="0">
+                <a:solidFill>
+                  <a:srgbClr val="101F37"/>
+                </a:solidFill>
+                <a:latin typeface="Microsoft YaHei"/>
+                <a:ea typeface="Microsoft YaHei"/>
+                <a:cs typeface="Microsoft YaHei"/>
+              </a:defRPr>
+            </a:pPr>
+            <a:r>
+              <a:rPr sz="1725" b="0">
+                <a:solidFill>
+                  <a:srgbClr val="101F37"/>
+                </a:solidFill>
+                <a:latin typeface="Microsoft YaHei"/>
+                <a:ea typeface="Microsoft YaHei"/>
+                <a:cs typeface="Microsoft YaHei"/>
+              </a:rPr>
+              <a:t>视频扩散生成</a:t>
+            </a:r>
+          </a:p>
+        </p:txBody>
+      </p:sp>
+      <p:sp>
+        <p:nvSpPr>
+          <p:cNvPr id="11" name="矩形 10">
+            <a:extLst>
+              <a:ext uri="{FF2B5EF4-FFF2-40B4-BE49-F238E27FC236}">
+                <a16:creationId xmlns:a16="http://schemas.microsoft.com/office/drawing/2014/main" id="{29A642C8-66E0-3B2F-C361-59FF7417D541}"/>
               </a:ext>
             </a:extLst>
           </p:cNvPr>
@@ -9017,8 +9622,8 @@
         </p:nvSpPr>
         <p:spPr>
           <a:xfrm>
-            <a:off x="781050" y="4476750"/>
-            <a:ext cx="2733675" cy="428625"/>
+            <a:off x="7448550" y="2667000"/>
+            <a:ext cx="4000500" cy="619125"/>
           </a:xfrm>
           <a:prstGeom prst="rect">
             <a:avLst/>
@@ -9034,36 +9639,59 @@
           </a:bodyPr>
           <a:lstStyle/>
           <a:p>
-            <a:pPr algn="l">
-              <a:defRPr sz="1950" b="1">
-                <a:solidFill>
-                  <a:srgbClr val="0D569A"/>
-                </a:solidFill>
-                <a:latin typeface="Microsoft YaHei"/>
-                <a:ea typeface="Microsoft YaHei"/>
-                <a:cs typeface="Microsoft YaHei"/>
-              </a:defRPr>
-            </a:pPr>
-            <a:r>
-              <a:rPr sz="1950" b="1">
-                <a:solidFill>
-                  <a:srgbClr val="0D569A"/>
-                </a:solidFill>
-                <a:latin typeface="Microsoft YaHei"/>
-                <a:ea typeface="Microsoft YaHei"/>
-                <a:cs typeface="Microsoft YaHei"/>
-              </a:rPr>
-              <a:t>虚化参数控制</a:t>
-            </a:r>
-          </a:p>
-        </p:txBody>
-      </p:sp>
-      <p:sp>
-        <p:nvSpPr>
-          <p:cNvPr id="39" name="矩形 38">
-            <a:extLst>
-              <a:ext uri="{FF2B5EF4-FFF2-40B4-BE49-F238E27FC236}">
-                <a16:creationId xmlns:a16="http://schemas.microsoft.com/office/drawing/2014/main" id="{8F77F4D8-807D-9991-2D12-D6307A180417}"/>
+            <a:pPr>
+              <a:defRPr sz="1725" b="0">
+                <a:solidFill>
+                  <a:srgbClr val="101F37"/>
+                </a:solidFill>
+                <a:latin typeface="Microsoft YaHei"/>
+                <a:ea typeface="Microsoft YaHei"/>
+                <a:cs typeface="Microsoft YaHei"/>
+              </a:defRPr>
+            </a:pPr>
+            <a:r>
+              <a:rPr sz="1725" b="0">
+                <a:solidFill>
+                  <a:srgbClr val="101F37"/>
+                </a:solidFill>
+                <a:latin typeface="Microsoft YaHei"/>
+                <a:ea typeface="Microsoft YaHei"/>
+                <a:cs typeface="Microsoft YaHei"/>
+              </a:rPr>
+              <a:t>时序建模、动态对焦</a:t>
+            </a:r>
+          </a:p>
+          <a:p>
+            <a:pPr>
+              <a:defRPr sz="1725" b="0">
+                <a:solidFill>
+                  <a:srgbClr val="101F37"/>
+                </a:solidFill>
+                <a:latin typeface="Microsoft YaHei"/>
+                <a:ea typeface="Microsoft YaHei"/>
+                <a:cs typeface="Microsoft YaHei"/>
+              </a:defRPr>
+            </a:pPr>
+            <a:r>
+              <a:rPr sz="1725" b="0">
+                <a:solidFill>
+                  <a:srgbClr val="101F37"/>
+                </a:solidFill>
+                <a:latin typeface="Microsoft YaHei"/>
+                <a:ea typeface="Microsoft YaHei"/>
+                <a:cs typeface="Microsoft YaHei"/>
+              </a:rPr>
+              <a:t>视频变化评价</a:t>
+            </a:r>
+          </a:p>
+        </p:txBody>
+      </p:sp>
+      <p:sp>
+        <p:nvSpPr>
+          <p:cNvPr id="12" name="矩形 11">
+            <a:extLst>
+              <a:ext uri="{FF2B5EF4-FFF2-40B4-BE49-F238E27FC236}">
+                <a16:creationId xmlns:a16="http://schemas.microsoft.com/office/drawing/2014/main" id="{CE204456-1E85-3844-0751-5D8EE62B6539}"/>
               </a:ext>
             </a:extLst>
           </p:cNvPr>
@@ -9074,8 +9702,8 @@
         </p:nvSpPr>
         <p:spPr>
           <a:xfrm>
-            <a:off x="3714750" y="4476750"/>
-            <a:ext cx="7715250" cy="495300"/>
+            <a:off x="781050" y="3476625"/>
+            <a:ext cx="2667000" cy="619125"/>
           </a:xfrm>
           <a:prstGeom prst="rect">
             <a:avLst/>
@@ -9091,36 +9719,36 @@
           </a:bodyPr>
           <a:lstStyle/>
           <a:p>
-            <a:pPr algn="l">
-              <a:defRPr sz="1875" b="0">
-                <a:solidFill>
-                  <a:srgbClr val="101F37"/>
-                </a:solidFill>
-                <a:latin typeface="Microsoft YaHei"/>
-                <a:ea typeface="Microsoft YaHei"/>
-                <a:cs typeface="Microsoft YaHei"/>
-              </a:defRPr>
-            </a:pPr>
-            <a:r>
-              <a:rPr sz="1875" b="0">
-                <a:solidFill>
-                  <a:srgbClr val="101F37"/>
-                </a:solidFill>
-                <a:latin typeface="Microsoft YaHei"/>
-                <a:ea typeface="Microsoft YaHei"/>
-                <a:cs typeface="Microsoft YaHei"/>
-              </a:rPr>
-              <a:t>改变对焦、光圈等参数后，哪些部分需要重新计算</a:t>
-            </a:r>
-          </a:p>
-        </p:txBody>
-      </p:sp>
-      <p:sp>
-        <p:nvSpPr>
-          <p:cNvPr id="40" name="矩形 39">
-            <a:extLst>
-              <a:ext uri="{FF2B5EF4-FFF2-40B4-BE49-F238E27FC236}">
-                <a16:creationId xmlns:a16="http://schemas.microsoft.com/office/drawing/2014/main" id="{D97CD3E1-C098-E066-95FA-634CC9B7C579}"/>
+            <a:pPr>
+              <a:defRPr sz="1875" b="1">
+                <a:solidFill>
+                  <a:srgbClr val="0D569A"/>
+                </a:solidFill>
+                <a:latin typeface="Microsoft YaHei"/>
+                <a:ea typeface="Microsoft YaHei"/>
+                <a:cs typeface="Microsoft YaHei"/>
+              </a:defRPr>
+            </a:pPr>
+            <a:r>
+              <a:rPr sz="1875" b="1">
+                <a:solidFill>
+                  <a:srgbClr val="0D569A"/>
+                </a:solidFill>
+                <a:latin typeface="Microsoft YaHei"/>
+                <a:ea typeface="Microsoft YaHei"/>
+                <a:cs typeface="Microsoft YaHei"/>
+              </a:rPr>
+              <a:t>Any-to-Bokeh</a:t>
+            </a:r>
+          </a:p>
+        </p:txBody>
+      </p:sp>
+      <p:sp>
+        <p:nvSpPr>
+          <p:cNvPr id="13" name="矩形 12">
+            <a:extLst>
+              <a:ext uri="{FF2B5EF4-FFF2-40B4-BE49-F238E27FC236}">
+                <a16:creationId xmlns:a16="http://schemas.microsoft.com/office/drawing/2014/main" id="{248A5AC5-CED9-7770-B4BE-DD548F6405C3}"/>
               </a:ext>
             </a:extLst>
           </p:cNvPr>
@@ -9131,8 +9759,8 @@
         </p:nvSpPr>
         <p:spPr>
           <a:xfrm>
-            <a:off x="781050" y="5610225"/>
-            <a:ext cx="10477500" cy="504825"/>
+            <a:off x="3533775" y="3476625"/>
+            <a:ext cx="3714750" cy="619125"/>
           </a:xfrm>
           <a:prstGeom prst="rect">
             <a:avLst/>
@@ -9148,9 +9776,169 @@
           </a:bodyPr>
           <a:lstStyle/>
           <a:p>
-            <a:pPr algn="l">
+            <a:pPr>
               <a:defRPr sz="1725" b="0">
                 <a:solidFill>
+                  <a:srgbClr val="101F37"/>
+                </a:solidFill>
+                <a:latin typeface="Microsoft YaHei"/>
+                <a:ea typeface="Microsoft YaHei"/>
+                <a:cs typeface="Microsoft YaHei"/>
+              </a:defRPr>
+            </a:pPr>
+            <a:r>
+              <a:rPr sz="1725" b="0">
+                <a:solidFill>
+                  <a:srgbClr val="101F37"/>
+                </a:solidFill>
+                <a:latin typeface="Microsoft YaHei"/>
+                <a:ea typeface="Microsoft YaHei"/>
+                <a:cs typeface="Microsoft YaHei"/>
+              </a:rPr>
+              <a:t>视频 + 逐帧几何 + 对焦设置</a:t>
+            </a:r>
+          </a:p>
+          <a:p>
+            <a:pPr>
+              <a:defRPr sz="1725" b="0">
+                <a:solidFill>
+                  <a:srgbClr val="101F37"/>
+                </a:solidFill>
+                <a:latin typeface="Microsoft YaHei"/>
+                <a:ea typeface="Microsoft YaHei"/>
+                <a:cs typeface="Microsoft YaHei"/>
+              </a:defRPr>
+            </a:pPr>
+            <a:r>
+              <a:rPr sz="1725" b="0">
+                <a:solidFill>
+                  <a:srgbClr val="101F37"/>
+                </a:solidFill>
+                <a:latin typeface="Microsoft YaHei"/>
+                <a:ea typeface="Microsoft YaHei"/>
+                <a:cs typeface="Microsoft YaHei"/>
+              </a:rPr>
+              <a:t>单步视频生成</a:t>
+            </a:r>
+          </a:p>
+        </p:txBody>
+      </p:sp>
+      <p:sp>
+        <p:nvSpPr>
+          <p:cNvPr id="14" name="矩形 13">
+            <a:extLst>
+              <a:ext uri="{FF2B5EF4-FFF2-40B4-BE49-F238E27FC236}">
+                <a16:creationId xmlns:a16="http://schemas.microsoft.com/office/drawing/2014/main" id="{45EF6207-DBBB-78D3-2F8F-DCD3DEF19E0A}"/>
+              </a:ext>
+            </a:extLst>
+          </p:cNvPr>
+          <p:cNvSpPr>
+            <a:spLocks noGrp="1"/>
+          </p:cNvSpPr>
+          <p:nvPr/>
+        </p:nvSpPr>
+        <p:spPr>
+          <a:xfrm>
+            <a:off x="7448550" y="3476625"/>
+            <a:ext cx="4000500" cy="619125"/>
+          </a:xfrm>
+          <a:prstGeom prst="rect">
+            <a:avLst/>
+          </a:prstGeom>
+          <a:noFill/>
+          <a:ln w="0">
+            <a:noFill/>
+          </a:ln>
+        </p:spPr>
+        <p:txBody>
+          <a:bodyPr wrap="square" lIns="0" tIns="0" rIns="0" bIns="0" anchor="ctr">
+            <a:noAutofit/>
+          </a:bodyPr>
+          <a:lstStyle/>
+          <a:p>
+            <a:pPr>
+              <a:defRPr sz="1725" b="0">
+                <a:solidFill>
+                  <a:srgbClr val="101F37"/>
+                </a:solidFill>
+                <a:latin typeface="Microsoft YaHei"/>
+                <a:ea typeface="Microsoft YaHei"/>
+                <a:cs typeface="Microsoft YaHei"/>
+              </a:defRPr>
+            </a:pPr>
+            <a:r>
+              <a:rPr sz="1725" b="0">
+                <a:solidFill>
+                  <a:srgbClr val="101F37"/>
+                </a:solidFill>
+                <a:latin typeface="Microsoft YaHei"/>
+                <a:ea typeface="Microsoft YaHei"/>
+                <a:cs typeface="Microsoft YaHei"/>
+              </a:rPr>
+              <a:t>几何扰动训练</a:t>
+            </a:r>
+          </a:p>
+          <a:p>
+            <a:pPr>
+              <a:defRPr sz="1725" b="0">
+                <a:solidFill>
+                  <a:srgbClr val="101F37"/>
+                </a:solidFill>
+                <a:latin typeface="Microsoft YaHei"/>
+                <a:ea typeface="Microsoft YaHei"/>
+                <a:cs typeface="Microsoft YaHei"/>
+              </a:defRPr>
+            </a:pPr>
+            <a:r>
+              <a:rPr sz="1725" b="0">
+                <a:solidFill>
+                  <a:srgbClr val="101F37"/>
+                </a:solidFill>
+                <a:latin typeface="Microsoft YaHei"/>
+                <a:ea typeface="Microsoft YaHei"/>
+                <a:cs typeface="Microsoft YaHei"/>
+              </a:rPr>
+              <a:t>解码器细节恢复</a:t>
+            </a:r>
+          </a:p>
+        </p:txBody>
+      </p:sp>
+      <p:sp>
+        <p:nvSpPr>
+          <p:cNvPr id="15" name="矩形 14">
+            <a:extLst>
+              <a:ext uri="{FF2B5EF4-FFF2-40B4-BE49-F238E27FC236}">
+                <a16:creationId xmlns:a16="http://schemas.microsoft.com/office/drawing/2014/main" id="{1E473F2D-1278-26E8-4CF4-72BD8759652C}"/>
+              </a:ext>
+            </a:extLst>
+          </p:cNvPr>
+          <p:cNvSpPr>
+            <a:spLocks noGrp="1"/>
+          </p:cNvSpPr>
+          <p:nvPr/>
+        </p:nvSpPr>
+        <p:spPr>
+          <a:xfrm>
+            <a:off x="781050" y="4286250"/>
+            <a:ext cx="2667000" cy="619125"/>
+          </a:xfrm>
+          <a:prstGeom prst="rect">
+            <a:avLst/>
+          </a:prstGeom>
+          <a:noFill/>
+          <a:ln w="0">
+            <a:noFill/>
+          </a:ln>
+        </p:spPr>
+        <p:txBody>
+          <a:bodyPr wrap="square" lIns="0" tIns="0" rIns="0" bIns="0" anchor="ctr">
+            <a:noAutofit/>
+          </a:bodyPr>
+          <a:lstStyle/>
+          <a:p>
+            <a:pPr>
+              <a:defRPr sz="1875" b="1">
+                <a:solidFill>
                   <a:srgbClr val="0D569A"/>
                 </a:solidFill>
                 <a:latin typeface="Microsoft YaHei"/>
@@ -9159,15 +9947,392 @@
               </a:defRPr>
             </a:pPr>
             <a:r>
+              <a:rPr sz="1875" b="1">
+                <a:solidFill>
+                  <a:srgbClr val="0D569A"/>
+                </a:solidFill>
+                <a:latin typeface="Microsoft YaHei"/>
+                <a:ea typeface="Microsoft YaHei"/>
+                <a:cs typeface="Microsoft YaHei"/>
+              </a:rPr>
+              <a:t>MagicBokeh</a:t>
+            </a:r>
+          </a:p>
+        </p:txBody>
+      </p:sp>
+      <p:sp>
+        <p:nvSpPr>
+          <p:cNvPr id="16" name="矩形 15">
+            <a:extLst>
+              <a:ext uri="{FF2B5EF4-FFF2-40B4-BE49-F238E27FC236}">
+                <a16:creationId xmlns:a16="http://schemas.microsoft.com/office/drawing/2014/main" id="{A976F8C5-F9FF-D4E4-5048-8FDB9D5D26DF}"/>
+              </a:ext>
+            </a:extLst>
+          </p:cNvPr>
+          <p:cNvSpPr>
+            <a:spLocks noGrp="1"/>
+          </p:cNvSpPr>
+          <p:nvPr/>
+        </p:nvSpPr>
+        <p:spPr>
+          <a:xfrm>
+            <a:off x="3533775" y="4286250"/>
+            <a:ext cx="3714750" cy="619125"/>
+          </a:xfrm>
+          <a:prstGeom prst="rect">
+            <a:avLst/>
+          </a:prstGeom>
+          <a:noFill/>
+          <a:ln w="0">
+            <a:noFill/>
+          </a:ln>
+        </p:spPr>
+        <p:txBody>
+          <a:bodyPr wrap="square" lIns="0" tIns="0" rIns="0" bIns="0" anchor="ctr">
+            <a:noAutofit/>
+          </a:bodyPr>
+          <a:lstStyle/>
+          <a:p>
+            <a:pPr>
+              <a:defRPr sz="1725" b="0">
+                <a:solidFill>
+                  <a:srgbClr val="101F37"/>
+                </a:solidFill>
+                <a:latin typeface="Microsoft YaHei"/>
+                <a:ea typeface="Microsoft YaHei"/>
+                <a:cs typeface="Microsoft YaHei"/>
+              </a:defRPr>
+            </a:pPr>
+            <a:r>
               <a:rPr sz="1725" b="0">
                 <a:solidFill>
+                  <a:srgbClr val="101F37"/>
+                </a:solidFill>
+                <a:latin typeface="Microsoft YaHei"/>
+                <a:ea typeface="Microsoft YaHei"/>
+                <a:cs typeface="Microsoft YaHei"/>
+              </a:rPr>
+              <a:t>低质量单图 + 虚化设置</a:t>
+            </a:r>
+          </a:p>
+          <a:p>
+            <a:pPr>
+              <a:defRPr sz="1725" b="0">
+                <a:solidFill>
+                  <a:srgbClr val="101F37"/>
+                </a:solidFill>
+                <a:latin typeface="Microsoft YaHei"/>
+                <a:ea typeface="Microsoft YaHei"/>
+                <a:cs typeface="Microsoft YaHei"/>
+              </a:defRPr>
+            </a:pPr>
+            <a:r>
+              <a:rPr sz="1725" b="0">
+                <a:solidFill>
+                  <a:srgbClr val="101F37"/>
+                </a:solidFill>
+                <a:latin typeface="Microsoft YaHei"/>
+                <a:ea typeface="Microsoft YaHei"/>
+                <a:cs typeface="Microsoft YaHei"/>
+              </a:rPr>
+              <a:t>联合细节恢复与虚化</a:t>
+            </a:r>
+          </a:p>
+        </p:txBody>
+      </p:sp>
+      <p:sp>
+        <p:nvSpPr>
+          <p:cNvPr id="17" name="矩形 16">
+            <a:extLst>
+              <a:ext uri="{FF2B5EF4-FFF2-40B4-BE49-F238E27FC236}">
+                <a16:creationId xmlns:a16="http://schemas.microsoft.com/office/drawing/2014/main" id="{FC61F89F-383A-BCF7-DDF9-E4D515629F8B}"/>
+              </a:ext>
+            </a:extLst>
+          </p:cNvPr>
+          <p:cNvSpPr>
+            <a:spLocks noGrp="1"/>
+          </p:cNvSpPr>
+          <p:nvPr/>
+        </p:nvSpPr>
+        <p:spPr>
+          <a:xfrm>
+            <a:off x="7448550" y="4286250"/>
+            <a:ext cx="4000500" cy="619125"/>
+          </a:xfrm>
+          <a:prstGeom prst="rect">
+            <a:avLst/>
+          </a:prstGeom>
+          <a:noFill/>
+          <a:ln w="0">
+            <a:noFill/>
+          </a:ln>
+        </p:spPr>
+        <p:txBody>
+          <a:bodyPr wrap="square" lIns="0" tIns="0" rIns="0" bIns="0" anchor="ctr">
+            <a:noAutofit/>
+          </a:bodyPr>
+          <a:lstStyle/>
+          <a:p>
+            <a:pPr>
+              <a:defRPr sz="1725" b="0">
+                <a:solidFill>
+                  <a:srgbClr val="101F37"/>
+                </a:solidFill>
+                <a:latin typeface="Microsoft YaHei"/>
+                <a:ea typeface="Microsoft YaHei"/>
+                <a:cs typeface="Microsoft YaHei"/>
+              </a:defRPr>
+            </a:pPr>
+            <a:r>
+              <a:rPr sz="1725" b="0">
+                <a:solidFill>
+                  <a:srgbClr val="101F37"/>
+                </a:solidFill>
+                <a:latin typeface="Microsoft YaHei"/>
+                <a:ea typeface="Microsoft YaHei"/>
+                <a:cs typeface="Microsoft YaHei"/>
+              </a:rPr>
+              <a:t>掩码引导注意力</a:t>
+            </a:r>
+          </a:p>
+          <a:p>
+            <a:pPr>
+              <a:defRPr sz="1725" b="0">
+                <a:solidFill>
+                  <a:srgbClr val="101F37"/>
+                </a:solidFill>
+                <a:latin typeface="Microsoft YaHei"/>
+                <a:ea typeface="Microsoft YaHei"/>
+                <a:cs typeface="Microsoft YaHei"/>
+              </a:defRPr>
+            </a:pPr>
+            <a:r>
+              <a:rPr sz="1725" b="0">
+                <a:solidFill>
+                  <a:srgbClr val="101F37"/>
+                </a:solidFill>
+                <a:latin typeface="Microsoft YaHei"/>
+                <a:ea typeface="Microsoft YaHei"/>
+                <a:cs typeface="Microsoft YaHei"/>
+              </a:rPr>
+              <a:t>深度抗退化、交替训练</a:t>
+            </a:r>
+          </a:p>
+        </p:txBody>
+      </p:sp>
+      <p:sp>
+        <p:nvSpPr>
+          <p:cNvPr id="18" name="矩形 17">
+            <a:extLst>
+              <a:ext uri="{FF2B5EF4-FFF2-40B4-BE49-F238E27FC236}">
+                <a16:creationId xmlns:a16="http://schemas.microsoft.com/office/drawing/2014/main" id="{892361DF-383D-57D4-C62E-8154D8FD6B38}"/>
+              </a:ext>
+            </a:extLst>
+          </p:cNvPr>
+          <p:cNvSpPr>
+            <a:spLocks noGrp="1"/>
+          </p:cNvSpPr>
+          <p:nvPr/>
+        </p:nvSpPr>
+        <p:spPr>
+          <a:xfrm>
+            <a:off x="781050" y="5095875"/>
+            <a:ext cx="2667000" cy="619125"/>
+          </a:xfrm>
+          <a:prstGeom prst="rect">
+            <a:avLst/>
+          </a:prstGeom>
+          <a:noFill/>
+          <a:ln w="0">
+            <a:noFill/>
+          </a:ln>
+        </p:spPr>
+        <p:txBody>
+          <a:bodyPr wrap="square" lIns="0" tIns="0" rIns="0" bIns="0" anchor="ctr">
+            <a:noAutofit/>
+          </a:bodyPr>
+          <a:lstStyle/>
+          <a:p>
+            <a:pPr>
+              <a:defRPr sz="1875" b="1">
+                <a:solidFill>
                   <a:srgbClr val="0D569A"/>
                 </a:solidFill>
                 <a:latin typeface="Microsoft YaHei"/>
                 <a:ea typeface="Microsoft YaHei"/>
                 <a:cs typeface="Microsoft YaHei"/>
-              </a:rPr>
-              <a:t>结合相关文献，进一步明确各部分的具体实现。</a:t>
+              </a:defRPr>
+            </a:pPr>
+            <a:r>
+              <a:rPr sz="1875" b="1">
+                <a:solidFill>
+                  <a:srgbClr val="0D569A"/>
+                </a:solidFill>
+                <a:latin typeface="Microsoft YaHei"/>
+                <a:ea typeface="Microsoft YaHei"/>
+                <a:cs typeface="Microsoft YaHei"/>
+              </a:rPr>
+              <a:t>Bokeh Diffusion</a:t>
+            </a:r>
+          </a:p>
+        </p:txBody>
+      </p:sp>
+      <p:sp>
+        <p:nvSpPr>
+          <p:cNvPr id="19" name="矩形 18">
+            <a:extLst>
+              <a:ext uri="{FF2B5EF4-FFF2-40B4-BE49-F238E27FC236}">
+                <a16:creationId xmlns:a16="http://schemas.microsoft.com/office/drawing/2014/main" id="{02B4C4E0-1588-05B6-50D7-BF415B16CA17}"/>
+              </a:ext>
+            </a:extLst>
+          </p:cNvPr>
+          <p:cNvSpPr>
+            <a:spLocks noGrp="1"/>
+          </p:cNvSpPr>
+          <p:nvPr/>
+        </p:nvSpPr>
+        <p:spPr>
+          <a:xfrm>
+            <a:off x="3533775" y="5095875"/>
+            <a:ext cx="3714750" cy="619125"/>
+          </a:xfrm>
+          <a:prstGeom prst="rect">
+            <a:avLst/>
+          </a:prstGeom>
+          <a:noFill/>
+          <a:ln w="0">
+            <a:noFill/>
+          </a:ln>
+        </p:spPr>
+        <p:txBody>
+          <a:bodyPr wrap="square" lIns="0" tIns="0" rIns="0" bIns="0" anchor="ctr">
+            <a:noAutofit/>
+          </a:bodyPr>
+          <a:lstStyle/>
+          <a:p>
+            <a:pPr>
+              <a:defRPr sz="1725" b="0">
+                <a:solidFill>
+                  <a:srgbClr val="101F37"/>
+                </a:solidFill>
+                <a:latin typeface="Microsoft YaHei"/>
+                <a:ea typeface="Microsoft YaHei"/>
+                <a:cs typeface="Microsoft YaHei"/>
+              </a:defRPr>
+            </a:pPr>
+            <a:r>
+              <a:rPr sz="1725" b="0">
+                <a:solidFill>
+                  <a:srgbClr val="101F37"/>
+                </a:solidFill>
+                <a:latin typeface="Microsoft YaHei"/>
+                <a:ea typeface="Microsoft YaHei"/>
+                <a:cs typeface="Microsoft YaHei"/>
+              </a:rPr>
+              <a:t>文本或图像编辑 + 虚化参数</a:t>
+            </a:r>
+          </a:p>
+          <a:p>
+            <a:pPr>
+              <a:defRPr sz="1725" b="0">
+                <a:solidFill>
+                  <a:srgbClr val="101F37"/>
+                </a:solidFill>
+                <a:latin typeface="Microsoft YaHei"/>
+                <a:ea typeface="Microsoft YaHei"/>
+                <a:cs typeface="Microsoft YaHei"/>
+              </a:defRPr>
+            </a:pPr>
+            <a:r>
+              <a:rPr sz="1725" b="0">
+                <a:solidFill>
+                  <a:srgbClr val="101F37"/>
+                </a:solidFill>
+                <a:latin typeface="Microsoft YaHei"/>
+                <a:ea typeface="Microsoft YaHei"/>
+                <a:cs typeface="Microsoft YaHei"/>
+              </a:rPr>
+              <a:t>可控离焦生成</a:t>
+            </a:r>
+          </a:p>
+        </p:txBody>
+      </p:sp>
+      <p:sp>
+        <p:nvSpPr>
+          <p:cNvPr id="20" name="矩形 19">
+            <a:extLst>
+              <a:ext uri="{FF2B5EF4-FFF2-40B4-BE49-F238E27FC236}">
+                <a16:creationId xmlns:a16="http://schemas.microsoft.com/office/drawing/2014/main" id="{814D166C-485E-127D-5B93-2D8390175142}"/>
+              </a:ext>
+            </a:extLst>
+          </p:cNvPr>
+          <p:cNvSpPr>
+            <a:spLocks noGrp="1"/>
+          </p:cNvSpPr>
+          <p:nvPr/>
+        </p:nvSpPr>
+        <p:spPr>
+          <a:xfrm>
+            <a:off x="7448550" y="5095875"/>
+            <a:ext cx="4000500" cy="619125"/>
+          </a:xfrm>
+          <a:prstGeom prst="rect">
+            <a:avLst/>
+          </a:prstGeom>
+          <a:noFill/>
+          <a:ln w="0">
+            <a:noFill/>
+          </a:ln>
+        </p:spPr>
+        <p:txBody>
+          <a:bodyPr wrap="square" lIns="0" tIns="0" rIns="0" bIns="0" anchor="ctr">
+            <a:noAutofit/>
+          </a:bodyPr>
+          <a:lstStyle/>
+          <a:p>
+            <a:pPr>
+              <a:defRPr sz="1725" b="0">
+                <a:solidFill>
+                  <a:srgbClr val="101F37"/>
+                </a:solidFill>
+                <a:latin typeface="Microsoft YaHei"/>
+                <a:ea typeface="Microsoft YaHei"/>
+                <a:cs typeface="Microsoft YaHei"/>
+              </a:defRPr>
+            </a:pPr>
+            <a:r>
+              <a:rPr sz="1725" b="0">
+                <a:solidFill>
+                  <a:srgbClr val="101F37"/>
+                </a:solidFill>
+                <a:latin typeface="Microsoft YaHei"/>
+                <a:ea typeface="Microsoft YaHei"/>
+                <a:cs typeface="Microsoft YaHei"/>
+              </a:rPr>
+              <a:t>独立虚化参数控制</a:t>
+            </a:r>
+          </a:p>
+          <a:p>
+            <a:pPr>
+              <a:defRPr sz="1725" b="0">
+                <a:solidFill>
+                  <a:srgbClr val="101F37"/>
+                </a:solidFill>
+                <a:latin typeface="Microsoft YaHei"/>
+                <a:ea typeface="Microsoft YaHei"/>
+                <a:cs typeface="Microsoft YaHei"/>
+              </a:defRPr>
+            </a:pPr>
+            <a:r>
+              <a:rPr sz="1725" b="0">
+                <a:solidFill>
+                  <a:srgbClr val="101F37"/>
+                </a:solidFill>
+                <a:latin typeface="Microsoft YaHei"/>
+                <a:ea typeface="Microsoft YaHei"/>
+                <a:cs typeface="Microsoft YaHei"/>
+              </a:rPr>
+              <a:t>真实与合成数据结合</a:t>
             </a:r>
           </a:p>
         </p:txBody>
@@ -9176,6 +10341,940 @@
     <p:extLst>
       <p:ext uri="{BB962C8B-B14F-4D97-AF65-F5344CB8AC3E}">
         <p14:creationId xmlns:p14="http://schemas.microsoft.com/office/powerpoint/2010/main" val="2392966058"/>
+      </p:ext>
+    </p:extLst>
+  </p:cSld>
+  <p:clrMapOvr>
+    <a:masterClrMapping/>
+  </p:clrMapOvr>
+</p:sld>
+</file>
+
+<file path=ppt/slides/slide11.xml><?xml version="1.0" encoding="utf-8"?>
+<p:sld xmlns:a="http://schemas.openxmlformats.org/drawingml/2006/main" xmlns:r="http://schemas.openxmlformats.org/officeDocument/2006/relationships" xmlns:p="http://schemas.openxmlformats.org/presentationml/2006/main">
+  <p:cSld>
+    <p:spTree>
+      <p:nvGrpSpPr>
+        <p:cNvPr id="1" name=""/>
+        <p:cNvGrpSpPr/>
+        <p:nvPr/>
+      </p:nvGrpSpPr>
+      <p:grpSpPr>
+        <a:xfrm>
+          <a:off x="0" y="0"/>
+          <a:ext cx="0" cy="0"/>
+          <a:chOff x="0" y="0"/>
+          <a:chExt cx="0" cy="0"/>
+        </a:xfrm>
+      </p:grpSpPr>
+      <p:sp>
+        <p:nvSpPr>
+          <p:cNvPr id="29" name="title-9">
+            <a:extLst>
+              <a:ext uri="{FF2B5EF4-FFF2-40B4-BE49-F238E27FC236}">
+                <a16:creationId xmlns:a16="http://schemas.microsoft.com/office/drawing/2014/main" id="{2256B31A-25B3-40DF-8C68-DA84C813DB41}"/>
+              </a:ext>
+            </a:extLst>
+          </p:cNvPr>
+          <p:cNvSpPr>
+            <a:spLocks noGrp="1"/>
+          </p:cNvSpPr>
+          <p:nvPr/>
+        </p:nvSpPr>
+        <p:spPr>
+          <a:xfrm>
+            <a:off x="666750" y="285750"/>
+            <a:ext cx="9620250" cy="495300"/>
+          </a:xfrm>
+          <a:prstGeom prst="rect">
+            <a:avLst/>
+          </a:prstGeom>
+          <a:noFill/>
+          <a:ln w="0">
+            <a:noFill/>
+            <a:prstDash val="solid"/>
+          </a:ln>
+        </p:spPr>
+        <p:txBody>
+          <a:bodyPr wrap="square" lIns="38100" tIns="19050" rIns="38100" bIns="19050" anchor="ctr">
+            <a:noAutofit/>
+          </a:bodyPr>
+          <a:lstStyle/>
+          <a:p>
+            <a:pPr algn="l">
+              <a:lnSpc>
+                <a:spcPct val="108000"/>
+              </a:lnSpc>
+              <a:buNone/>
+              <a:defRPr sz="2850" b="1">
+                <a:solidFill>
+                  <a:srgbClr val="101F37"/>
+                </a:solidFill>
+                <a:latin typeface="Microsoft YaHei"/>
+                <a:ea typeface="Microsoft YaHei"/>
+                <a:cs typeface="Microsoft YaHei"/>
+              </a:defRPr>
+            </a:pPr>
+            <a:r>
+              <a:rPr lang="zh-CN" altLang="en-US" sz="2850" b="1">
+                <a:solidFill>
+                  <a:srgbClr val="101F37"/>
+                </a:solidFill>
+                <a:latin typeface="Microsoft YaHei"/>
+                <a:ea typeface="Microsoft YaHei"/>
+                <a:cs typeface="Microsoft YaHei"/>
+              </a:rPr>
+              <a:t>后续文献调研</a:t>
+            </a:r>
+            <a:endParaRPr sz="2850" b="1">
+              <a:solidFill>
+                <a:srgbClr val="101F37"/>
+              </a:solidFill>
+              <a:latin typeface="Microsoft YaHei"/>
+              <a:ea typeface="Microsoft YaHei"/>
+              <a:cs typeface="Microsoft YaHei"/>
+            </a:endParaRPr>
+          </a:p>
+        </p:txBody>
+      </p:sp>
+      <p:sp>
+        <p:nvSpPr>
+          <p:cNvPr id="3" name="page-9">
+            <a:extLst>
+              <a:ext uri="{FF2B5EF4-FFF2-40B4-BE49-F238E27FC236}">
+                <a16:creationId xmlns:a16="http://schemas.microsoft.com/office/drawing/2014/main" id="{B3972419-FC19-447E-A42C-4D7ECFB1CBC0}"/>
+              </a:ext>
+            </a:extLst>
+          </p:cNvPr>
+          <p:cNvSpPr>
+            <a:spLocks noGrp="1"/>
+          </p:cNvSpPr>
+          <p:nvPr/>
+        </p:nvSpPr>
+        <p:spPr>
+          <a:xfrm>
+            <a:off x="5810250" y="6515100"/>
+            <a:ext cx="571500" cy="228600"/>
+          </a:xfrm>
+          <a:prstGeom prst="rect">
+            <a:avLst/>
+          </a:prstGeom>
+          <a:solidFill>
+            <a:srgbClr val="0D569A"/>
+          </a:solidFill>
+          <a:ln w="0">
+            <a:noFill/>
+            <a:prstDash val="solid"/>
+          </a:ln>
+        </p:spPr>
+        <p:txBody>
+          <a:bodyPr wrap="square" lIns="38100" tIns="19050" rIns="38100" bIns="19050" anchor="ctr">
+            <a:normAutofit/>
+          </a:bodyPr>
+          <a:lstStyle/>
+          <a:p>
+            <a:pPr algn="ctr">
+              <a:lnSpc>
+                <a:spcPct val="108000"/>
+              </a:lnSpc>
+              <a:buNone/>
+              <a:defRPr sz="1050" b="1">
+                <a:solidFill>
+                  <a:srgbClr val="FFFFFF"/>
+                </a:solidFill>
+                <a:latin typeface="Microsoft YaHei"/>
+                <a:ea typeface="Microsoft YaHei"/>
+                <a:cs typeface="Microsoft YaHei"/>
+              </a:defRPr>
+            </a:pPr>
+            <a:r>
+              <a:rPr lang="en-US" altLang="zh-CN" sz="1050" b="1">
+                <a:solidFill>
+                  <a:srgbClr val="FFFFFF"/>
+                </a:solidFill>
+                <a:latin typeface="Microsoft YaHei"/>
+                <a:ea typeface="Microsoft YaHei"/>
+                <a:cs typeface="Microsoft YaHei"/>
+              </a:rPr>
+              <a:t>10</a:t>
+            </a:r>
+            <a:endParaRPr sz="1050" b="1">
+              <a:solidFill>
+                <a:srgbClr val="FFFFFF"/>
+              </a:solidFill>
+              <a:latin typeface="Microsoft YaHei"/>
+              <a:ea typeface="Microsoft YaHei"/>
+              <a:cs typeface="Microsoft YaHei"/>
+            </a:endParaRPr>
+          </a:p>
+        </p:txBody>
+      </p:sp>
+      <p:sp>
+        <p:nvSpPr>
+          <p:cNvPr id="30" name="矩形 29">
+            <a:extLst>
+              <a:ext uri="{FF2B5EF4-FFF2-40B4-BE49-F238E27FC236}">
+                <a16:creationId xmlns:a16="http://schemas.microsoft.com/office/drawing/2014/main" id="{76D126E8-D108-D45B-1D05-FF911E3F5DA4}"/>
+              </a:ext>
+            </a:extLst>
+          </p:cNvPr>
+          <p:cNvSpPr>
+            <a:spLocks noGrp="1"/>
+          </p:cNvSpPr>
+          <p:nvPr/>
+        </p:nvSpPr>
+        <p:spPr>
+          <a:xfrm>
+            <a:off x="781050" y="1314450"/>
+            <a:ext cx="2733675" cy="428625"/>
+          </a:xfrm>
+          <a:prstGeom prst="rect">
+            <a:avLst/>
+          </a:prstGeom>
+          <a:noFill/>
+          <a:ln w="0">
+            <a:noFill/>
+          </a:ln>
+        </p:spPr>
+        <p:txBody>
+          <a:bodyPr wrap="square" lIns="0" tIns="0" rIns="0" bIns="0" anchor="ctr">
+            <a:noAutofit/>
+          </a:bodyPr>
+          <a:lstStyle/>
+          <a:p>
+            <a:pPr algn="l">
+              <a:defRPr sz="1950" b="1">
+                <a:solidFill>
+                  <a:srgbClr val="0D569A"/>
+                </a:solidFill>
+                <a:latin typeface="Microsoft YaHei"/>
+                <a:ea typeface="Microsoft YaHei"/>
+                <a:cs typeface="Microsoft YaHei"/>
+              </a:defRPr>
+            </a:pPr>
+            <a:r>
+              <a:rPr lang="zh-CN" altLang="en-US" sz="1950" b="1">
+                <a:solidFill>
+                  <a:srgbClr val="0D569A"/>
+                </a:solidFill>
+                <a:latin typeface="Microsoft YaHei"/>
+                <a:ea typeface="Microsoft YaHei"/>
+                <a:cs typeface="Microsoft YaHei"/>
+              </a:rPr>
+              <a:t>低帧率深度传播</a:t>
+            </a:r>
+            <a:endParaRPr sz="1950" b="1">
+              <a:solidFill>
+                <a:srgbClr val="0D569A"/>
+              </a:solidFill>
+              <a:latin typeface="Microsoft YaHei"/>
+              <a:ea typeface="Microsoft YaHei"/>
+              <a:cs typeface="Microsoft YaHei"/>
+            </a:endParaRPr>
+          </a:p>
+        </p:txBody>
+      </p:sp>
+      <p:sp>
+        <p:nvSpPr>
+          <p:cNvPr id="31" name="矩形 30">
+            <a:extLst>
+              <a:ext uri="{FF2B5EF4-FFF2-40B4-BE49-F238E27FC236}">
+                <a16:creationId xmlns:a16="http://schemas.microsoft.com/office/drawing/2014/main" id="{3452CFA0-AFFA-1649-93FA-3C4787C8BE98}"/>
+              </a:ext>
+            </a:extLst>
+          </p:cNvPr>
+          <p:cNvSpPr>
+            <a:spLocks noGrp="1"/>
+          </p:cNvSpPr>
+          <p:nvPr/>
+        </p:nvSpPr>
+        <p:spPr>
+          <a:xfrm>
+            <a:off x="3714750" y="1314450"/>
+            <a:ext cx="7715250" cy="495300"/>
+          </a:xfrm>
+          <a:prstGeom prst="rect">
+            <a:avLst/>
+          </a:prstGeom>
+          <a:noFill/>
+          <a:ln w="0">
+            <a:noFill/>
+          </a:ln>
+        </p:spPr>
+        <p:txBody>
+          <a:bodyPr wrap="square" lIns="0" tIns="0" rIns="0" bIns="0" anchor="ctr">
+            <a:noAutofit/>
+          </a:bodyPr>
+          <a:lstStyle/>
+          <a:p>
+            <a:pPr algn="l">
+              <a:defRPr sz="1875" b="0">
+                <a:solidFill>
+                  <a:srgbClr val="101F37"/>
+                </a:solidFill>
+                <a:latin typeface="Microsoft YaHei"/>
+                <a:ea typeface="Microsoft YaHei"/>
+                <a:cs typeface="Microsoft YaHei"/>
+              </a:defRPr>
+            </a:pPr>
+            <a:r>
+              <a:rPr lang="zh-CN" altLang="en-US" sz="1875" b="0">
+                <a:solidFill>
+                  <a:srgbClr val="101F37"/>
+                </a:solidFill>
+                <a:latin typeface="Microsoft YaHei"/>
+                <a:ea typeface="Microsoft YaHei"/>
+                <a:cs typeface="Microsoft YaHei"/>
+              </a:rPr>
+              <a:t>缺失帧的传播方式，以及有效性和置信度的参与方式</a:t>
+            </a:r>
+            <a:endParaRPr sz="1875" b="0">
+              <a:solidFill>
+                <a:srgbClr val="101F37"/>
+              </a:solidFill>
+              <a:latin typeface="Microsoft YaHei"/>
+              <a:ea typeface="Microsoft YaHei"/>
+              <a:cs typeface="Microsoft YaHei"/>
+            </a:endParaRPr>
+          </a:p>
+        </p:txBody>
+      </p:sp>
+      <p:sp>
+        <p:nvSpPr>
+          <p:cNvPr id="32" name="矩形 31">
+            <a:extLst>
+              <a:ext uri="{FF2B5EF4-FFF2-40B4-BE49-F238E27FC236}">
+                <a16:creationId xmlns:a16="http://schemas.microsoft.com/office/drawing/2014/main" id="{B6F637BF-B468-F0BE-0B93-C12B982E3C49}"/>
+              </a:ext>
+            </a:extLst>
+          </p:cNvPr>
+          <p:cNvSpPr>
+            <a:spLocks noGrp="1"/>
+          </p:cNvSpPr>
+          <p:nvPr/>
+        </p:nvSpPr>
+        <p:spPr>
+          <a:xfrm>
+            <a:off x="781050" y="2105025"/>
+            <a:ext cx="2733675" cy="428625"/>
+          </a:xfrm>
+          <a:prstGeom prst="rect">
+            <a:avLst/>
+          </a:prstGeom>
+          <a:noFill/>
+          <a:ln w="0">
+            <a:noFill/>
+          </a:ln>
+        </p:spPr>
+        <p:txBody>
+          <a:bodyPr wrap="square" lIns="0" tIns="0" rIns="0" bIns="0" anchor="ctr">
+            <a:noAutofit/>
+          </a:bodyPr>
+          <a:lstStyle/>
+          <a:p>
+            <a:pPr algn="l">
+              <a:defRPr sz="1950" b="1">
+                <a:solidFill>
+                  <a:srgbClr val="0D569A"/>
+                </a:solidFill>
+                <a:latin typeface="Microsoft YaHei"/>
+                <a:ea typeface="Microsoft YaHei"/>
+                <a:cs typeface="Microsoft YaHei"/>
+              </a:defRPr>
+            </a:pPr>
+            <a:r>
+              <a:rPr lang="zh-CN" altLang="en-US" sz="1950" b="1">
+                <a:solidFill>
+                  <a:srgbClr val="0D569A"/>
+                </a:solidFill>
+                <a:latin typeface="Microsoft YaHei"/>
+                <a:ea typeface="Microsoft YaHei"/>
+                <a:cs typeface="Microsoft YaHei"/>
+              </a:rPr>
+              <a:t>稠密输出恢复</a:t>
+            </a:r>
+            <a:endParaRPr sz="1950" b="1">
+              <a:solidFill>
+                <a:srgbClr val="0D569A"/>
+              </a:solidFill>
+              <a:latin typeface="Microsoft YaHei"/>
+              <a:ea typeface="Microsoft YaHei"/>
+              <a:cs typeface="Microsoft YaHei"/>
+            </a:endParaRPr>
+          </a:p>
+        </p:txBody>
+      </p:sp>
+      <p:sp>
+        <p:nvSpPr>
+          <p:cNvPr id="33" name="矩形 32">
+            <a:extLst>
+              <a:ext uri="{FF2B5EF4-FFF2-40B4-BE49-F238E27FC236}">
+                <a16:creationId xmlns:a16="http://schemas.microsoft.com/office/drawing/2014/main" id="{40D28070-F121-9282-93DE-80B34B8C6406}"/>
+              </a:ext>
+            </a:extLst>
+          </p:cNvPr>
+          <p:cNvSpPr>
+            <a:spLocks noGrp="1"/>
+          </p:cNvSpPr>
+          <p:nvPr/>
+        </p:nvSpPr>
+        <p:spPr>
+          <a:xfrm>
+            <a:off x="3714750" y="2105025"/>
+            <a:ext cx="7715250" cy="495300"/>
+          </a:xfrm>
+          <a:prstGeom prst="rect">
+            <a:avLst/>
+          </a:prstGeom>
+          <a:noFill/>
+          <a:ln w="0">
+            <a:noFill/>
+          </a:ln>
+        </p:spPr>
+        <p:txBody>
+          <a:bodyPr wrap="square" lIns="0" tIns="0" rIns="0" bIns="0" anchor="ctr">
+            <a:noAutofit/>
+          </a:bodyPr>
+          <a:lstStyle/>
+          <a:p>
+            <a:pPr algn="l">
+              <a:defRPr sz="1875" b="0">
+                <a:solidFill>
+                  <a:srgbClr val="101F37"/>
+                </a:solidFill>
+                <a:latin typeface="Microsoft YaHei"/>
+                <a:ea typeface="Microsoft YaHei"/>
+                <a:cs typeface="Microsoft YaHei"/>
+              </a:defRPr>
+            </a:pPr>
+            <a:r>
+              <a:rPr lang="zh-CN" altLang="en-US" sz="1875" b="0">
+                <a:solidFill>
+                  <a:srgbClr val="101F37"/>
+                </a:solidFill>
+                <a:latin typeface="Microsoft YaHei"/>
+                <a:ea typeface="Microsoft YaHei"/>
+                <a:cs typeface="Microsoft YaHei"/>
+              </a:rPr>
+              <a:t>特征合并后，如何恢复逐像素深度与</a:t>
+            </a:r>
+            <a:r>
+              <a:rPr lang="en-US" sz="1875" b="0">
+                <a:solidFill>
+                  <a:srgbClr val="101F37"/>
+                </a:solidFill>
+                <a:latin typeface="Microsoft YaHei"/>
+                <a:ea typeface="Microsoft YaHei"/>
+                <a:cs typeface="Microsoft YaHei"/>
+              </a:rPr>
+              <a:t>Alpha</a:t>
+            </a:r>
+            <a:endParaRPr sz="1875" b="0">
+              <a:solidFill>
+                <a:srgbClr val="101F37"/>
+              </a:solidFill>
+              <a:latin typeface="Microsoft YaHei"/>
+              <a:ea typeface="Microsoft YaHei"/>
+              <a:cs typeface="Microsoft YaHei"/>
+            </a:endParaRPr>
+          </a:p>
+        </p:txBody>
+      </p:sp>
+      <p:sp>
+        <p:nvSpPr>
+          <p:cNvPr id="34" name="矩形 33">
+            <a:extLst>
+              <a:ext uri="{FF2B5EF4-FFF2-40B4-BE49-F238E27FC236}">
+                <a16:creationId xmlns:a16="http://schemas.microsoft.com/office/drawing/2014/main" id="{2D372892-C919-020A-43A9-1023C91A7EAC}"/>
+              </a:ext>
+            </a:extLst>
+          </p:cNvPr>
+          <p:cNvSpPr>
+            <a:spLocks noGrp="1"/>
+          </p:cNvSpPr>
+          <p:nvPr/>
+        </p:nvSpPr>
+        <p:spPr>
+          <a:xfrm>
+            <a:off x="781050" y="2895600"/>
+            <a:ext cx="2733675" cy="428625"/>
+          </a:xfrm>
+          <a:prstGeom prst="rect">
+            <a:avLst/>
+          </a:prstGeom>
+          <a:noFill/>
+          <a:ln w="0">
+            <a:noFill/>
+          </a:ln>
+        </p:spPr>
+        <p:txBody>
+          <a:bodyPr wrap="square" lIns="0" tIns="0" rIns="0" bIns="0" anchor="ctr">
+            <a:noAutofit/>
+          </a:bodyPr>
+          <a:lstStyle/>
+          <a:p>
+            <a:pPr algn="l">
+              <a:defRPr sz="1950" b="1">
+                <a:solidFill>
+                  <a:srgbClr val="0D569A"/>
+                </a:solidFill>
+                <a:latin typeface="Microsoft YaHei"/>
+                <a:ea typeface="Microsoft YaHei"/>
+                <a:cs typeface="Microsoft YaHei"/>
+              </a:defRPr>
+            </a:pPr>
+            <a:r>
+              <a:rPr lang="zh-CN" altLang="en-US" sz="1950" b="1">
+                <a:solidFill>
+                  <a:srgbClr val="0D569A"/>
+                </a:solidFill>
+                <a:latin typeface="Microsoft YaHei"/>
+                <a:ea typeface="Microsoft YaHei"/>
+                <a:cs typeface="Microsoft YaHei"/>
+              </a:rPr>
+              <a:t>深度与</a:t>
+            </a:r>
+            <a:r>
+              <a:rPr lang="en-US" sz="1950" b="1">
+                <a:solidFill>
+                  <a:srgbClr val="0D569A"/>
+                </a:solidFill>
+                <a:latin typeface="Microsoft YaHei"/>
+                <a:ea typeface="Microsoft YaHei"/>
+                <a:cs typeface="Microsoft YaHei"/>
+              </a:rPr>
+              <a:t>Alpha</a:t>
+            </a:r>
+            <a:endParaRPr sz="1950" b="1">
+              <a:solidFill>
+                <a:srgbClr val="0D569A"/>
+              </a:solidFill>
+              <a:latin typeface="Microsoft YaHei"/>
+              <a:ea typeface="Microsoft YaHei"/>
+              <a:cs typeface="Microsoft YaHei"/>
+            </a:endParaRPr>
+          </a:p>
+        </p:txBody>
+      </p:sp>
+      <p:sp>
+        <p:nvSpPr>
+          <p:cNvPr id="35" name="矩形 34">
+            <a:extLst>
+              <a:ext uri="{FF2B5EF4-FFF2-40B4-BE49-F238E27FC236}">
+                <a16:creationId xmlns:a16="http://schemas.microsoft.com/office/drawing/2014/main" id="{EF5A4F72-782A-2B53-BEED-93B65D06EC7D}"/>
+              </a:ext>
+            </a:extLst>
+          </p:cNvPr>
+          <p:cNvSpPr>
+            <a:spLocks noGrp="1"/>
+          </p:cNvSpPr>
+          <p:nvPr/>
+        </p:nvSpPr>
+        <p:spPr>
+          <a:xfrm>
+            <a:off x="3714750" y="2895600"/>
+            <a:ext cx="7715250" cy="495300"/>
+          </a:xfrm>
+          <a:prstGeom prst="rect">
+            <a:avLst/>
+          </a:prstGeom>
+          <a:noFill/>
+          <a:ln w="0">
+            <a:noFill/>
+          </a:ln>
+        </p:spPr>
+        <p:txBody>
+          <a:bodyPr wrap="square" lIns="0" tIns="0" rIns="0" bIns="0" anchor="ctr">
+            <a:noAutofit/>
+          </a:bodyPr>
+          <a:lstStyle/>
+          <a:p>
+            <a:pPr algn="l">
+              <a:defRPr sz="1875" b="0">
+                <a:solidFill>
+                  <a:srgbClr val="101F37"/>
+                </a:solidFill>
+                <a:latin typeface="Microsoft YaHei"/>
+                <a:ea typeface="Microsoft YaHei"/>
+                <a:cs typeface="Microsoft YaHei"/>
+              </a:defRPr>
+            </a:pPr>
+            <a:r>
+              <a:rPr lang="zh-CN" altLang="en-US" sz="1875" b="0">
+                <a:solidFill>
+                  <a:srgbClr val="101F37"/>
+                </a:solidFill>
+                <a:latin typeface="Microsoft YaHei"/>
+                <a:ea typeface="Microsoft YaHei"/>
+                <a:cs typeface="Microsoft YaHei"/>
+              </a:rPr>
+              <a:t>深度边缘如何传递给</a:t>
+            </a:r>
+            <a:r>
+              <a:rPr lang="en-US" altLang="zh-CN" sz="1875" b="0">
+                <a:solidFill>
+                  <a:srgbClr val="101F37"/>
+                </a:solidFill>
+                <a:latin typeface="Microsoft YaHei"/>
+                <a:ea typeface="Microsoft YaHei"/>
+                <a:cs typeface="Microsoft YaHei"/>
+              </a:rPr>
+              <a:t>Alpha</a:t>
+            </a:r>
+            <a:r>
+              <a:rPr lang="zh-CN" altLang="en-US" sz="1875" b="0">
+                <a:solidFill>
+                  <a:srgbClr val="101F37"/>
+                </a:solidFill>
+                <a:latin typeface="Microsoft YaHei"/>
+                <a:ea typeface="Microsoft YaHei"/>
+                <a:cs typeface="Microsoft YaHei"/>
+              </a:rPr>
+              <a:t>头</a:t>
+            </a:r>
+            <a:endParaRPr sz="1875" b="0">
+              <a:solidFill>
+                <a:srgbClr val="101F37"/>
+              </a:solidFill>
+              <a:latin typeface="Microsoft YaHei"/>
+              <a:ea typeface="Microsoft YaHei"/>
+              <a:cs typeface="Microsoft YaHei"/>
+            </a:endParaRPr>
+          </a:p>
+        </p:txBody>
+      </p:sp>
+      <p:sp>
+        <p:nvSpPr>
+          <p:cNvPr id="36" name="矩形 35">
+            <a:extLst>
+              <a:ext uri="{FF2B5EF4-FFF2-40B4-BE49-F238E27FC236}">
+                <a16:creationId xmlns:a16="http://schemas.microsoft.com/office/drawing/2014/main" id="{067E9B1E-509A-FD6E-D782-2C9258F910B4}"/>
+              </a:ext>
+            </a:extLst>
+          </p:cNvPr>
+          <p:cNvSpPr>
+            <a:spLocks noGrp="1"/>
+          </p:cNvSpPr>
+          <p:nvPr/>
+        </p:nvSpPr>
+        <p:spPr>
+          <a:xfrm>
+            <a:off x="781050" y="3686175"/>
+            <a:ext cx="2733675" cy="428625"/>
+          </a:xfrm>
+          <a:prstGeom prst="rect">
+            <a:avLst/>
+          </a:prstGeom>
+          <a:noFill/>
+          <a:ln w="0">
+            <a:noFill/>
+          </a:ln>
+        </p:spPr>
+        <p:txBody>
+          <a:bodyPr wrap="square" lIns="0" tIns="0" rIns="0" bIns="0" anchor="ctr">
+            <a:noAutofit/>
+          </a:bodyPr>
+          <a:lstStyle/>
+          <a:p>
+            <a:pPr algn="l">
+              <a:defRPr sz="1950" b="1">
+                <a:solidFill>
+                  <a:srgbClr val="0D569A"/>
+                </a:solidFill>
+                <a:latin typeface="Microsoft YaHei"/>
+                <a:ea typeface="Microsoft YaHei"/>
+                <a:cs typeface="Microsoft YaHei"/>
+              </a:defRPr>
+            </a:pPr>
+            <a:r>
+              <a:rPr lang="zh-CN" altLang="en-US" sz="1950" b="1">
+                <a:solidFill>
+                  <a:srgbClr val="0D569A"/>
+                </a:solidFill>
+                <a:latin typeface="Microsoft YaHei"/>
+                <a:ea typeface="Microsoft YaHei"/>
+                <a:cs typeface="Microsoft YaHei"/>
+              </a:rPr>
+              <a:t>多任务共享</a:t>
+            </a:r>
+            <a:endParaRPr sz="1950" b="1">
+              <a:solidFill>
+                <a:srgbClr val="0D569A"/>
+              </a:solidFill>
+              <a:latin typeface="Microsoft YaHei"/>
+              <a:ea typeface="Microsoft YaHei"/>
+              <a:cs typeface="Microsoft YaHei"/>
+            </a:endParaRPr>
+          </a:p>
+        </p:txBody>
+      </p:sp>
+      <p:sp>
+        <p:nvSpPr>
+          <p:cNvPr id="37" name="矩形 36">
+            <a:extLst>
+              <a:ext uri="{FF2B5EF4-FFF2-40B4-BE49-F238E27FC236}">
+                <a16:creationId xmlns:a16="http://schemas.microsoft.com/office/drawing/2014/main" id="{F421EA0C-5504-B2D9-718F-47FB7B18FC56}"/>
+              </a:ext>
+            </a:extLst>
+          </p:cNvPr>
+          <p:cNvSpPr>
+            <a:spLocks noGrp="1"/>
+          </p:cNvSpPr>
+          <p:nvPr/>
+        </p:nvSpPr>
+        <p:spPr>
+          <a:xfrm>
+            <a:off x="3714750" y="3686175"/>
+            <a:ext cx="7715250" cy="495300"/>
+          </a:xfrm>
+          <a:prstGeom prst="rect">
+            <a:avLst/>
+          </a:prstGeom>
+          <a:noFill/>
+          <a:ln w="0">
+            <a:noFill/>
+          </a:ln>
+        </p:spPr>
+        <p:txBody>
+          <a:bodyPr wrap="square" lIns="0" tIns="0" rIns="0" bIns="0" anchor="ctr">
+            <a:noAutofit/>
+          </a:bodyPr>
+          <a:lstStyle/>
+          <a:p>
+            <a:pPr algn="l">
+              <a:defRPr sz="1875" b="0">
+                <a:solidFill>
+                  <a:srgbClr val="101F37"/>
+                </a:solidFill>
+                <a:latin typeface="Microsoft YaHei"/>
+                <a:ea typeface="Microsoft YaHei"/>
+                <a:cs typeface="Microsoft YaHei"/>
+              </a:defRPr>
+            </a:pPr>
+            <a:r>
+              <a:rPr lang="zh-CN" altLang="en-US" sz="1875" b="0">
+                <a:solidFill>
+                  <a:srgbClr val="101F37"/>
+                </a:solidFill>
+                <a:latin typeface="Microsoft YaHei"/>
+                <a:ea typeface="Microsoft YaHei"/>
+                <a:cs typeface="Microsoft YaHei"/>
+              </a:rPr>
+              <a:t>共享范围、交替训练与任务冲突处理</a:t>
+            </a:r>
+            <a:endParaRPr sz="1875" b="0">
+              <a:solidFill>
+                <a:srgbClr val="101F37"/>
+              </a:solidFill>
+              <a:latin typeface="Microsoft YaHei"/>
+              <a:ea typeface="Microsoft YaHei"/>
+              <a:cs typeface="Microsoft YaHei"/>
+            </a:endParaRPr>
+          </a:p>
+        </p:txBody>
+      </p:sp>
+      <p:sp>
+        <p:nvSpPr>
+          <p:cNvPr id="38" name="矩形 37">
+            <a:extLst>
+              <a:ext uri="{FF2B5EF4-FFF2-40B4-BE49-F238E27FC236}">
+                <a16:creationId xmlns:a16="http://schemas.microsoft.com/office/drawing/2014/main" id="{53E70CCD-4008-01C9-8908-ABFA81C541EE}"/>
+              </a:ext>
+            </a:extLst>
+          </p:cNvPr>
+          <p:cNvSpPr>
+            <a:spLocks noGrp="1"/>
+          </p:cNvSpPr>
+          <p:nvPr/>
+        </p:nvSpPr>
+        <p:spPr>
+          <a:xfrm>
+            <a:off x="781050" y="4476750"/>
+            <a:ext cx="2733675" cy="428625"/>
+          </a:xfrm>
+          <a:prstGeom prst="rect">
+            <a:avLst/>
+          </a:prstGeom>
+          <a:noFill/>
+          <a:ln w="0">
+            <a:noFill/>
+          </a:ln>
+        </p:spPr>
+        <p:txBody>
+          <a:bodyPr wrap="square" lIns="0" tIns="0" rIns="0" bIns="0" anchor="ctr">
+            <a:noAutofit/>
+          </a:bodyPr>
+          <a:lstStyle/>
+          <a:p>
+            <a:pPr algn="l">
+              <a:defRPr sz="1950" b="1">
+                <a:solidFill>
+                  <a:srgbClr val="0D569A"/>
+                </a:solidFill>
+                <a:latin typeface="Microsoft YaHei"/>
+                <a:ea typeface="Microsoft YaHei"/>
+                <a:cs typeface="Microsoft YaHei"/>
+              </a:defRPr>
+            </a:pPr>
+            <a:r>
+              <a:rPr lang="zh-CN" altLang="en-US" sz="1950" b="1">
+                <a:solidFill>
+                  <a:srgbClr val="0D569A"/>
+                </a:solidFill>
+                <a:latin typeface="Microsoft YaHei"/>
+                <a:ea typeface="Microsoft YaHei"/>
+                <a:cs typeface="Microsoft YaHei"/>
+              </a:rPr>
+              <a:t>边界渲染</a:t>
+            </a:r>
+            <a:endParaRPr sz="1950" b="1">
+              <a:solidFill>
+                <a:srgbClr val="0D569A"/>
+              </a:solidFill>
+              <a:latin typeface="Microsoft YaHei"/>
+              <a:ea typeface="Microsoft YaHei"/>
+              <a:cs typeface="Microsoft YaHei"/>
+            </a:endParaRPr>
+          </a:p>
+        </p:txBody>
+      </p:sp>
+      <p:sp>
+        <p:nvSpPr>
+          <p:cNvPr id="39" name="矩形 38">
+            <a:extLst>
+              <a:ext uri="{FF2B5EF4-FFF2-40B4-BE49-F238E27FC236}">
+                <a16:creationId xmlns:a16="http://schemas.microsoft.com/office/drawing/2014/main" id="{8F77F4D8-807D-9991-2D12-D6307A180417}"/>
+              </a:ext>
+            </a:extLst>
+          </p:cNvPr>
+          <p:cNvSpPr>
+            <a:spLocks noGrp="1"/>
+          </p:cNvSpPr>
+          <p:nvPr/>
+        </p:nvSpPr>
+        <p:spPr>
+          <a:xfrm>
+            <a:off x="3714750" y="4476750"/>
+            <a:ext cx="7715250" cy="495300"/>
+          </a:xfrm>
+          <a:prstGeom prst="rect">
+            <a:avLst/>
+          </a:prstGeom>
+          <a:noFill/>
+          <a:ln w="0">
+            <a:noFill/>
+          </a:ln>
+        </p:spPr>
+        <p:txBody>
+          <a:bodyPr wrap="square" lIns="0" tIns="0" rIns="0" bIns="0" anchor="ctr">
+            <a:noAutofit/>
+          </a:bodyPr>
+          <a:lstStyle/>
+          <a:p>
+            <a:pPr algn="l">
+              <a:defRPr sz="1875" b="0">
+                <a:solidFill>
+                  <a:srgbClr val="101F37"/>
+                </a:solidFill>
+                <a:latin typeface="Microsoft YaHei"/>
+                <a:ea typeface="Microsoft YaHei"/>
+                <a:cs typeface="Microsoft YaHei"/>
+              </a:defRPr>
+            </a:pPr>
+            <a:r>
+              <a:rPr lang="en-US" sz="1875" b="0">
+                <a:solidFill>
+                  <a:srgbClr val="101F37"/>
+                </a:solidFill>
+                <a:latin typeface="Microsoft YaHei"/>
+                <a:ea typeface="Microsoft YaHei"/>
+                <a:cs typeface="Microsoft YaHei"/>
+              </a:rPr>
+              <a:t>Alpha、</a:t>
+            </a:r>
+            <a:r>
+              <a:rPr lang="zh-CN" altLang="en-US" sz="1875" b="0">
+                <a:solidFill>
+                  <a:srgbClr val="101F37"/>
+                </a:solidFill>
+                <a:latin typeface="Microsoft YaHei"/>
+                <a:ea typeface="Microsoft YaHei"/>
+                <a:cs typeface="Microsoft YaHei"/>
+              </a:rPr>
+              <a:t>前景颜色与背景信息如何配合</a:t>
+            </a:r>
+            <a:endParaRPr sz="1875" b="0">
+              <a:solidFill>
+                <a:srgbClr val="101F37"/>
+              </a:solidFill>
+              <a:latin typeface="Microsoft YaHei"/>
+              <a:ea typeface="Microsoft YaHei"/>
+              <a:cs typeface="Microsoft YaHei"/>
+            </a:endParaRPr>
+          </a:p>
+        </p:txBody>
+      </p:sp>
+      <p:sp>
+        <p:nvSpPr>
+          <p:cNvPr id="40" name="矩形 39">
+            <a:extLst>
+              <a:ext uri="{FF2B5EF4-FFF2-40B4-BE49-F238E27FC236}">
+                <a16:creationId xmlns:a16="http://schemas.microsoft.com/office/drawing/2014/main" id="{D97CD3E1-C098-E066-95FA-634CC9B7C579}"/>
+              </a:ext>
+            </a:extLst>
+          </p:cNvPr>
+          <p:cNvSpPr>
+            <a:spLocks noGrp="1"/>
+          </p:cNvSpPr>
+          <p:nvPr/>
+        </p:nvSpPr>
+        <p:spPr>
+          <a:xfrm>
+            <a:off x="781050" y="5610225"/>
+            <a:ext cx="10477500" cy="504825"/>
+          </a:xfrm>
+          <a:prstGeom prst="rect">
+            <a:avLst/>
+          </a:prstGeom>
+          <a:noFill/>
+          <a:ln w="0">
+            <a:noFill/>
+          </a:ln>
+        </p:spPr>
+        <p:txBody>
+          <a:bodyPr wrap="square" lIns="0" tIns="0" rIns="0" bIns="0" anchor="ctr">
+            <a:noAutofit/>
+          </a:bodyPr>
+          <a:lstStyle/>
+          <a:p>
+            <a:pPr algn="l">
+              <a:defRPr sz="1725" b="0">
+                <a:solidFill>
+                  <a:srgbClr val="0D569A"/>
+                </a:solidFill>
+                <a:latin typeface="Microsoft YaHei"/>
+                <a:ea typeface="Microsoft YaHei"/>
+                <a:cs typeface="Microsoft YaHei"/>
+              </a:defRPr>
+            </a:pPr>
+            <a:r>
+              <a:rPr sz="1725" b="0">
+                <a:solidFill>
+                  <a:srgbClr val="0D569A"/>
+                </a:solidFill>
+                <a:latin typeface="Microsoft YaHei"/>
+                <a:ea typeface="Microsoft YaHei"/>
+                <a:cs typeface="Microsoft YaHei"/>
+              </a:rPr>
+              <a:t>结合相关文献，进一步明确各部分的具体实现。</a:t>
+            </a:r>
+          </a:p>
+        </p:txBody>
+      </p:sp>
+    </p:spTree>
+    <p:extLst>
+      <p:ext uri="{BB962C8B-B14F-4D97-AF65-F5344CB8AC3E}">
+        <p14:creationId xmlns:p14="http://schemas.microsoft.com/office/powerpoint/2010/main" val="3060774280"/>
       </p:ext>
     </p:extLst>
   </p:cSld>
@@ -11866,6 +13965,86 @@
           </a:p>
         </p:txBody>
       </p:sp>
+      <p:sp>
+        <p:nvSpPr>
+          <p:cNvPr id="2" name="矩形 1">
+            <a:extLst>
+              <a:ext uri="{FF2B5EF4-FFF2-40B4-BE49-F238E27FC236}">
+                <a16:creationId xmlns:a16="http://schemas.microsoft.com/office/drawing/2014/main" id="{582A799C-B66E-E4B8-9ED2-C2F2F29F178B}"/>
+              </a:ext>
+            </a:extLst>
+          </p:cNvPr>
+          <p:cNvSpPr>
+            <a:spLocks noGrp="1"/>
+          </p:cNvSpPr>
+          <p:nvPr/>
+        </p:nvSpPr>
+        <p:spPr>
+          <a:xfrm>
+            <a:off x="781050" y="5629275"/>
+            <a:ext cx="10668000" cy="628650"/>
+          </a:xfrm>
+          <a:prstGeom prst="rect">
+            <a:avLst/>
+          </a:prstGeom>
+          <a:noFill/>
+          <a:ln w="0">
+            <a:noFill/>
+          </a:ln>
+        </p:spPr>
+        <p:txBody>
+          <a:bodyPr wrap="square" lIns="0" tIns="0" rIns="0" bIns="0" anchor="ctr">
+            <a:noAutofit/>
+          </a:bodyPr>
+          <a:lstStyle/>
+          <a:p>
+            <a:pPr>
+              <a:defRPr sz="1688" b="0">
+                <a:solidFill>
+                  <a:srgbClr val="101F37"/>
+                </a:solidFill>
+                <a:latin typeface="Microsoft YaHei"/>
+                <a:ea typeface="Microsoft YaHei"/>
+                <a:cs typeface="Microsoft YaHei"/>
+              </a:defRPr>
+            </a:pPr>
+            <a:r>
+              <a:rPr sz="1688" b="0">
+                <a:solidFill>
+                  <a:srgbClr val="101F37"/>
+                </a:solidFill>
+                <a:latin typeface="Microsoft YaHei"/>
+                <a:ea typeface="Microsoft YaHei"/>
+                <a:cs typeface="Microsoft YaHei"/>
+              </a:rPr>
+              <a:t>参考MagicBokeh、Any-to-Bokeh：掩码参与注意力计算。</a:t>
+            </a:r>
+          </a:p>
+          <a:p>
+            <a:pPr>
+              <a:defRPr sz="1688" b="0">
+                <a:solidFill>
+                  <a:srgbClr val="101F37"/>
+                </a:solidFill>
+                <a:latin typeface="Microsoft YaHei"/>
+                <a:ea typeface="Microsoft YaHei"/>
+                <a:cs typeface="Microsoft YaHei"/>
+              </a:defRPr>
+            </a:pPr>
+            <a:r>
+              <a:rPr sz="1688" b="0">
+                <a:solidFill>
+                  <a:srgbClr val="101F37"/>
+                </a:solidFill>
+                <a:latin typeface="Microsoft YaHei"/>
+                <a:ea typeface="Microsoft YaHei"/>
+                <a:cs typeface="Microsoft YaHei"/>
+              </a:rPr>
+              <a:t>可比较D/M/C联合编码，以及M控制有效区域、C调节权重两种方式。</a:t>
+            </a:r>
+          </a:p>
+        </p:txBody>
+      </p:sp>
     </p:spTree>
     <p:extLst>
       <p:ext uri="{BB962C8B-B14F-4D97-AF65-F5344CB8AC3E}">
@@ -12622,10 +14801,10 @@
       </p:sp>
       <p:sp>
         <p:nvSpPr>
-          <p:cNvPr id="12" name="矩形 11">
-            <a:extLst>
-              <a:ext uri="{FF2B5EF4-FFF2-40B4-BE49-F238E27FC236}">
-                <a16:creationId xmlns:a16="http://schemas.microsoft.com/office/drawing/2014/main" id="{EF38863E-1E40-C641-C84E-F27D2AB2638A}"/>
+          <p:cNvPr id="13" name="矩形 12">
+            <a:extLst>
+              <a:ext uri="{FF2B5EF4-FFF2-40B4-BE49-F238E27FC236}">
+                <a16:creationId xmlns:a16="http://schemas.microsoft.com/office/drawing/2014/main" id="{9EC09F3B-D059-FF75-3ED8-AFA4C0EFDA7A}"/>
               </a:ext>
             </a:extLst>
           </p:cNvPr>
@@ -12636,8 +14815,8 @@
         </p:nvSpPr>
         <p:spPr>
           <a:xfrm>
-            <a:off x="781050" y="5686425"/>
-            <a:ext cx="10572750" cy="381000"/>
+            <a:off x="781050" y="5629275"/>
+            <a:ext cx="10668000" cy="628650"/>
           </a:xfrm>
           <a:prstGeom prst="rect">
             <a:avLst/>
@@ -12653,26 +14832,49 @@
           </a:bodyPr>
           <a:lstStyle/>
           <a:p>
-            <a:pPr algn="l">
-              <a:defRPr sz="1725" b="0">
-                <a:solidFill>
-                  <a:srgbClr val="0D569A"/>
-                </a:solidFill>
-                <a:latin typeface="Microsoft YaHei"/>
-                <a:ea typeface="Microsoft YaHei"/>
-                <a:cs typeface="Microsoft YaHei"/>
-              </a:defRPr>
-            </a:pPr>
-            <a:r>
-              <a:rPr sz="1725" b="0">
-                <a:solidFill>
-                  <a:srgbClr val="0D569A"/>
-                </a:solidFill>
-                <a:latin typeface="Microsoft YaHei"/>
-                <a:ea typeface="Microsoft YaHei"/>
-                <a:cs typeface="Microsoft YaHei"/>
-              </a:rPr>
-              <a:t>在特征层补充几何信息，同时减少重复特征。</a:t>
+            <a:pPr>
+              <a:defRPr sz="1688" b="0">
+                <a:solidFill>
+                  <a:srgbClr val="101F37"/>
+                </a:solidFill>
+                <a:latin typeface="Microsoft YaHei"/>
+                <a:ea typeface="Microsoft YaHei"/>
+                <a:cs typeface="Microsoft YaHei"/>
+              </a:defRPr>
+            </a:pPr>
+            <a:r>
+              <a:rPr sz="1688" b="0">
+                <a:solidFill>
+                  <a:srgbClr val="101F37"/>
+                </a:solidFill>
+                <a:latin typeface="Microsoft YaHei"/>
+                <a:ea typeface="Microsoft YaHei"/>
+                <a:cs typeface="Microsoft YaHei"/>
+              </a:rPr>
+              <a:t>参考Any-to-Bokeh：对逐帧几何加入扰动，利用邻帧提高抗噪能力。</a:t>
+            </a:r>
+          </a:p>
+          <a:p>
+            <a:pPr>
+              <a:defRPr sz="1688" b="0">
+                <a:solidFill>
+                  <a:srgbClr val="101F37"/>
+                </a:solidFill>
+                <a:latin typeface="Microsoft YaHei"/>
+                <a:ea typeface="Microsoft YaHei"/>
+                <a:cs typeface="Microsoft YaHei"/>
+              </a:defRPr>
+            </a:pPr>
+            <a:r>
+              <a:rPr sz="1688" b="0">
+                <a:solidFill>
+                  <a:srgbClr val="101F37"/>
+                </a:solidFill>
+                <a:latin typeface="Microsoft YaHei"/>
+                <a:ea typeface="Microsoft YaHei"/>
+                <a:cs typeface="Microsoft YaHei"/>
+              </a:rPr>
+              <a:t>可用于设计粗深度扰动训练。</a:t>
             </a:r>
           </a:p>
         </p:txBody>
@@ -13469,8 +15671,8 @@
         </p:nvSpPr>
         <p:spPr>
           <a:xfrm>
-            <a:off x="781050" y="5086350"/>
-            <a:ext cx="10668000" cy="914400"/>
+            <a:off x="781050" y="4940300"/>
+            <a:ext cx="10668000" cy="457200"/>
           </a:xfrm>
           <a:prstGeom prst="rect">
             <a:avLst/>
@@ -13497,7 +15699,7 @@
               </a:defRPr>
             </a:pPr>
             <a:r>
-              <a:rPr sz="1725" b="0">
+              <a:rPr lang="zh-CN" altLang="en-US" sz="1600" b="0">
                 <a:solidFill>
                   <a:srgbClr val="0D569A"/>
                 </a:solidFill>
@@ -13505,22 +15707,21 @@
                 <a:ea typeface="Microsoft YaHei"/>
                 <a:cs typeface="Microsoft YaHei"/>
               </a:rPr>
-              <a:t>训练约束：将前后帧输出按光流对齐，约束深度、Alpha和虚化的差异。</a:t>
-            </a:r>
-          </a:p>
-          <a:p>
-            <a:pPr algn="l">
-              <a:defRPr sz="1725" b="0">
+              <a:t>训练约束：光流对齐后的跨帧差异 </a:t>
+            </a:r>
+            <a:r>
+              <a:rPr lang="en-US" altLang="zh-CN" sz="1600" b="0">
                 <a:solidFill>
                   <a:srgbClr val="0D569A"/>
                 </a:solidFill>
                 <a:latin typeface="Microsoft YaHei"/>
                 <a:ea typeface="Microsoft YaHei"/>
                 <a:cs typeface="Microsoft YaHei"/>
-              </a:defRPr>
-            </a:pPr>
-            <a:r>
-              <a:rPr sz="1725" b="0">
+              </a:rPr>
+              <a:t>+ </a:t>
+            </a:r>
+            <a:r>
+              <a:rPr lang="zh-CN" altLang="en-US" sz="1600" b="0">
                 <a:solidFill>
                   <a:srgbClr val="0D569A"/>
                 </a:solidFill>
@@ -13528,7 +15729,95 @@
                 <a:ea typeface="Microsoft YaHei"/>
                 <a:cs typeface="Microsoft YaHei"/>
               </a:rPr>
-              <a:t>同时惩罚虚化边缘的抖动，约束作用于输出并回传到网络。</a:t>
+              <a:t>虚化边缘抖动惩罚</a:t>
+            </a:r>
+            <a:endParaRPr sz="1600" b="0">
+              <a:solidFill>
+                <a:srgbClr val="0D569A"/>
+              </a:solidFill>
+              <a:latin typeface="Microsoft YaHei"/>
+              <a:ea typeface="Microsoft YaHei"/>
+              <a:cs typeface="Microsoft YaHei"/>
+            </a:endParaRPr>
+          </a:p>
+        </p:txBody>
+      </p:sp>
+      <p:sp>
+        <p:nvSpPr>
+          <p:cNvPr id="6" name="矩形 5">
+            <a:extLst>
+              <a:ext uri="{FF2B5EF4-FFF2-40B4-BE49-F238E27FC236}">
+                <a16:creationId xmlns:a16="http://schemas.microsoft.com/office/drawing/2014/main" id="{16ADCC06-F6F2-7C4C-7AAF-C3A272477FFD}"/>
+              </a:ext>
+            </a:extLst>
+          </p:cNvPr>
+          <p:cNvSpPr>
+            <a:spLocks noGrp="1"/>
+          </p:cNvSpPr>
+          <p:nvPr/>
+        </p:nvSpPr>
+        <p:spPr>
+          <a:xfrm>
+            <a:off x="781050" y="5629275"/>
+            <a:ext cx="10668000" cy="628650"/>
+          </a:xfrm>
+          <a:prstGeom prst="rect">
+            <a:avLst/>
+          </a:prstGeom>
+          <a:noFill/>
+          <a:ln w="0">
+            <a:noFill/>
+          </a:ln>
+        </p:spPr>
+        <p:txBody>
+          <a:bodyPr wrap="square" lIns="0" tIns="0" rIns="0" bIns="0" anchor="ctr">
+            <a:noAutofit/>
+          </a:bodyPr>
+          <a:lstStyle/>
+          <a:p>
+            <a:pPr>
+              <a:defRPr sz="1688" b="0">
+                <a:solidFill>
+                  <a:srgbClr val="101F37"/>
+                </a:solidFill>
+                <a:latin typeface="Microsoft YaHei"/>
+                <a:ea typeface="Microsoft YaHei"/>
+                <a:cs typeface="Microsoft YaHei"/>
+              </a:defRPr>
+            </a:pPr>
+            <a:r>
+              <a:rPr sz="1688" b="0">
+                <a:solidFill>
+                  <a:srgbClr val="101F37"/>
+                </a:solidFill>
+                <a:latin typeface="Microsoft YaHei"/>
+                <a:ea typeface="Microsoft YaHei"/>
+                <a:cs typeface="Microsoft YaHei"/>
+              </a:rPr>
+              <a:t>参考BokehCrafter、Any-to-Bokeh：利用视频特征建模时序关系。</a:t>
+            </a:r>
+          </a:p>
+          <a:p>
+            <a:pPr>
+              <a:defRPr sz="1688" b="0">
+                <a:solidFill>
+                  <a:srgbClr val="101F37"/>
+                </a:solidFill>
+                <a:latin typeface="Microsoft YaHei"/>
+                <a:ea typeface="Microsoft YaHei"/>
+                <a:cs typeface="Microsoft YaHei"/>
+              </a:defRPr>
+            </a:pPr>
+            <a:r>
+              <a:rPr sz="1688" b="0">
+                <a:solidFill>
+                  <a:srgbClr val="101F37"/>
+                </a:solidFill>
+                <a:latin typeface="Microsoft YaHei"/>
+                <a:ea typeface="Microsoft YaHei"/>
+                <a:cs typeface="Microsoft YaHei"/>
+              </a:rPr>
+              <a:t>时序约束需考虑真实运动与对焦变化。</a:t>
             </a:r>
           </a:p>
         </p:txBody>
@@ -14580,6 +16869,86 @@
           </a:p>
         </p:txBody>
       </p:sp>
+      <p:sp>
+        <p:nvSpPr>
+          <p:cNvPr id="6" name="矩形 5">
+            <a:extLst>
+              <a:ext uri="{FF2B5EF4-FFF2-40B4-BE49-F238E27FC236}">
+                <a16:creationId xmlns:a16="http://schemas.microsoft.com/office/drawing/2014/main" id="{CD2753C0-FC62-A81C-6AA0-ABC515C17EAC}"/>
+              </a:ext>
+            </a:extLst>
+          </p:cNvPr>
+          <p:cNvSpPr>
+            <a:spLocks noGrp="1"/>
+          </p:cNvSpPr>
+          <p:nvPr/>
+        </p:nvSpPr>
+        <p:spPr>
+          <a:xfrm>
+            <a:off x="781050" y="5629275"/>
+            <a:ext cx="10668000" cy="628650"/>
+          </a:xfrm>
+          <a:prstGeom prst="rect">
+            <a:avLst/>
+          </a:prstGeom>
+          <a:noFill/>
+          <a:ln w="0">
+            <a:noFill/>
+          </a:ln>
+        </p:spPr>
+        <p:txBody>
+          <a:bodyPr wrap="square" lIns="0" tIns="0" rIns="0" bIns="0" anchor="ctr">
+            <a:noAutofit/>
+          </a:bodyPr>
+          <a:lstStyle/>
+          <a:p>
+            <a:pPr>
+              <a:defRPr sz="1688" b="0">
+                <a:solidFill>
+                  <a:srgbClr val="101F37"/>
+                </a:solidFill>
+                <a:latin typeface="Microsoft YaHei"/>
+                <a:ea typeface="Microsoft YaHei"/>
+                <a:cs typeface="Microsoft YaHei"/>
+              </a:defRPr>
+            </a:pPr>
+            <a:r>
+              <a:rPr sz="1688" b="0">
+                <a:solidFill>
+                  <a:srgbClr val="101F37"/>
+                </a:solidFill>
+                <a:latin typeface="Microsoft YaHei"/>
+                <a:ea typeface="Microsoft YaHei"/>
+                <a:cs typeface="Microsoft YaHei"/>
+              </a:rPr>
+              <a:t>参考Any-to-Bokeh：解码时引入编码器细节特征，并加入梯度约束。</a:t>
+            </a:r>
+          </a:p>
+          <a:p>
+            <a:pPr>
+              <a:defRPr sz="1688" b="0">
+                <a:solidFill>
+                  <a:srgbClr val="101F37"/>
+                </a:solidFill>
+                <a:latin typeface="Microsoft YaHei"/>
+                <a:ea typeface="Microsoft YaHei"/>
+                <a:cs typeface="Microsoft YaHei"/>
+              </a:defRPr>
+            </a:pPr>
+            <a:r>
+              <a:rPr sz="1688" b="0">
+                <a:solidFill>
+                  <a:srgbClr val="101F37"/>
+                </a:solidFill>
+                <a:latin typeface="Microsoft YaHei"/>
+                <a:ea typeface="Microsoft YaHei"/>
+                <a:cs typeface="Microsoft YaHei"/>
+              </a:rPr>
+              <a:t>可用于探索深度与Alpha输出的边缘恢复。</a:t>
+            </a:r>
+          </a:p>
+        </p:txBody>
+      </p:sp>
     </p:spTree>
     <p:extLst>
       <p:ext uri="{BB962C8B-B14F-4D97-AF65-F5344CB8AC3E}">
@@ -15255,8 +17624,8 @@
         </p:nvSpPr>
         <p:spPr>
           <a:xfrm>
-            <a:off x="781050" y="5200650"/>
-            <a:ext cx="10668000" cy="876300"/>
+            <a:off x="781050" y="4953000"/>
+            <a:ext cx="10668000" cy="546100"/>
           </a:xfrm>
           <a:prstGeom prst="rect">
             <a:avLst/>
@@ -15283,7 +17652,7 @@
               </a:defRPr>
             </a:pPr>
             <a:r>
-              <a:rPr sz="1725" b="0">
+              <a:rPr lang="zh-CN" altLang="en-US" sz="1500" b="0">
                 <a:solidFill>
                   <a:srgbClr val="0D569A"/>
                 </a:solidFill>
@@ -15291,7 +17660,29 @@
                 <a:ea typeface="Microsoft YaHei"/>
                 <a:cs typeface="Microsoft YaHei"/>
               </a:rPr>
-              <a:t>训练顺序：先预训练深度与Alpha，再用配套标签联合训练，最后整体微调。</a:t>
+              <a:t>训练：预训练深度与</a:t>
+            </a:r>
+            <a:r>
+              <a:rPr lang="en-US" altLang="zh-CN" sz="1500" b="0">
+                <a:solidFill>
+                  <a:srgbClr val="0D569A"/>
+                </a:solidFill>
+                <a:latin typeface="Microsoft YaHei"/>
+                <a:ea typeface="Microsoft YaHei"/>
+                <a:cs typeface="Microsoft YaHei"/>
+              </a:rPr>
+              <a:t>Alpha</a:t>
+            </a:r>
+            <a:r>
+              <a:rPr lang="zh-CN" altLang="en-US" sz="1500" b="0">
+                <a:solidFill>
+                  <a:srgbClr val="0D569A"/>
+                </a:solidFill>
+                <a:latin typeface="Microsoft YaHei"/>
+                <a:ea typeface="Microsoft YaHei"/>
+                <a:cs typeface="Microsoft YaHei"/>
+              </a:rPr>
+              <a:t>，再联合训练与整体微调</a:t>
             </a:r>
           </a:p>
           <a:p>
@@ -15306,7 +17697,7 @@
               </a:defRPr>
             </a:pPr>
             <a:r>
-              <a:rPr sz="1725" b="0">
+              <a:rPr lang="zh-CN" altLang="en-US" sz="1500" b="0">
                 <a:solidFill>
                   <a:srgbClr val="0D569A"/>
                 </a:solidFill>
@@ -15314,7 +17705,95 @@
                 <a:ea typeface="Microsoft YaHei"/>
                 <a:cs typeface="Microsoft YaHei"/>
               </a:rPr>
-              <a:t>渲染约束：平滑模糊参数的时间变化，减少虚化强度忽大忽小。</a:t>
+              <a:t>渲染：平滑模糊参数的时间变化</a:t>
+            </a:r>
+            <a:endParaRPr sz="1500" b="0">
+              <a:solidFill>
+                <a:srgbClr val="0D569A"/>
+              </a:solidFill>
+              <a:latin typeface="Microsoft YaHei"/>
+              <a:ea typeface="Microsoft YaHei"/>
+              <a:cs typeface="Microsoft YaHei"/>
+            </a:endParaRPr>
+          </a:p>
+        </p:txBody>
+      </p:sp>
+      <p:sp>
+        <p:nvSpPr>
+          <p:cNvPr id="11" name="矩形 10">
+            <a:extLst>
+              <a:ext uri="{FF2B5EF4-FFF2-40B4-BE49-F238E27FC236}">
+                <a16:creationId xmlns:a16="http://schemas.microsoft.com/office/drawing/2014/main" id="{30B4C331-8E6E-B63D-FAA0-4CD8EE24D964}"/>
+              </a:ext>
+            </a:extLst>
+          </p:cNvPr>
+          <p:cNvSpPr>
+            <a:spLocks noGrp="1"/>
+          </p:cNvSpPr>
+          <p:nvPr/>
+        </p:nvSpPr>
+        <p:spPr>
+          <a:xfrm>
+            <a:off x="781050" y="5629275"/>
+            <a:ext cx="10668000" cy="628650"/>
+          </a:xfrm>
+          <a:prstGeom prst="rect">
+            <a:avLst/>
+          </a:prstGeom>
+          <a:noFill/>
+          <a:ln w="0">
+            <a:noFill/>
+          </a:ln>
+        </p:spPr>
+        <p:txBody>
+          <a:bodyPr wrap="square" lIns="0" tIns="0" rIns="0" bIns="0" anchor="ctr">
+            <a:noAutofit/>
+          </a:bodyPr>
+          <a:lstStyle/>
+          <a:p>
+            <a:pPr>
+              <a:defRPr sz="1688" b="0">
+                <a:solidFill>
+                  <a:srgbClr val="101F37"/>
+                </a:solidFill>
+                <a:latin typeface="Microsoft YaHei"/>
+                <a:ea typeface="Microsoft YaHei"/>
+                <a:cs typeface="Microsoft YaHei"/>
+              </a:defRPr>
+            </a:pPr>
+            <a:r>
+              <a:rPr sz="1688" b="0">
+                <a:solidFill>
+                  <a:srgbClr val="101F37"/>
+                </a:solidFill>
+                <a:latin typeface="Microsoft YaHei"/>
+                <a:ea typeface="Microsoft YaHei"/>
+                <a:cs typeface="Microsoft YaHei"/>
+              </a:rPr>
+              <a:t>参考MagicBokeh、Bokeh Diffusion：结合几何与对焦位置控制模糊程度。</a:t>
+            </a:r>
+          </a:p>
+          <a:p>
+            <a:pPr>
+              <a:defRPr sz="1688" b="0">
+                <a:solidFill>
+                  <a:srgbClr val="101F37"/>
+                </a:solidFill>
+                <a:latin typeface="Microsoft YaHei"/>
+                <a:ea typeface="Microsoft YaHei"/>
+                <a:cs typeface="Microsoft YaHei"/>
+              </a:defRPr>
+            </a:pPr>
+            <a:r>
+              <a:rPr sz="1688" b="0">
+                <a:solidFill>
+                  <a:srgbClr val="101F37"/>
+                </a:solidFill>
+                <a:latin typeface="Microsoft YaHei"/>
+                <a:ea typeface="Microsoft YaHei"/>
+                <a:cs typeface="Microsoft YaHei"/>
+              </a:rPr>
+              <a:t>可将场景特征与对焦、光圈参数分别处理。</a:t>
             </a:r>
           </a:p>
         </p:txBody>
